--- a/html/GHS_BannerHealth_Presentation.pptx
+++ b/html/GHS_BannerHealth_Presentation.pptx
@@ -23780,2967 +23780,6 @@
                 <a:cs typeface="Calibri" pitchFamily="34" charset="-120"/>
               </a:rPr>
               <a:t>4 / 18</a:t>
-            </a:r>
-            <a:endParaRPr lang="en-US" sz="900" dirty="0"/>
-          </a:p>
-        </p:txBody>
-      </p:sp>
-    </p:spTree>
-  </p:cSld>
-  <p:clrMapOvr>
-    <a:masterClrMapping/>
-  </p:clrMapOvr>
-</p:sld>
-</file>
-
-<file path=ppt/slides/slide5.xml><?xml version="1.0" encoding="utf-8"?>
-<p:sld xmlns:a="http://schemas.openxmlformats.org/drawingml/2006/main" xmlns:r="http://schemas.openxmlformats.org/officeDocument/2006/relationships" xmlns:p="http://schemas.openxmlformats.org/presentationml/2006/main">
-  <p:cSld name="Slide 5">
-    <p:bg>
-      <p:bgPr>
-        <a:solidFill>
-          <a:srgbClr val="0B1F3A"/>
-        </a:solidFill>
-      </p:bgPr>
-    </p:bg>
-    <p:spTree>
-      <p:nvGrpSpPr>
-        <p:cNvPr id="1" name=""/>
-        <p:cNvGrpSpPr/>
-        <p:nvPr/>
-      </p:nvGrpSpPr>
-      <p:grpSpPr>
-        <a:xfrm>
-          <a:off x="0" y="0"/>
-          <a:ext cx="0" cy="0"/>
-          <a:chOff x="0" y="0"/>
-          <a:chExt cx="0" cy="0"/>
-        </a:xfrm>
-      </p:grpSpPr>
-      <p:sp>
-        <p:nvSpPr>
-          <p:cNvPr id="2" name="Shape 0"/>
-          <p:cNvSpPr/>
-          <p:nvPr/>
-        </p:nvSpPr>
-        <p:spPr>
-          <a:xfrm>
-            <a:off x="0" y="0"/>
-            <a:ext cx="164592" cy="6858000"/>
-          </a:xfrm>
-          <a:prstGeom prst="rect">
-            <a:avLst/>
-          </a:prstGeom>
-          <a:solidFill>
-            <a:srgbClr val="02C39A"/>
-          </a:solidFill>
-          <a:ln w="12700">
-            <a:solidFill>
-              <a:srgbClr val="02C39A"/>
-            </a:solidFill>
-            <a:prstDash val="solid"/>
-          </a:ln>
-        </p:spPr>
-      </p:sp>
-      <p:sp>
-        <p:nvSpPr>
-          <p:cNvPr id="3" name="Text 1"/>
-          <p:cNvSpPr/>
-          <p:nvPr/>
-        </p:nvSpPr>
-        <p:spPr>
-          <a:xfrm>
-            <a:off x="320040" y="201168"/>
-            <a:ext cx="11521440" cy="475488"/>
-          </a:xfrm>
-          <a:prstGeom prst="rect">
-            <a:avLst/>
-          </a:prstGeom>
-          <a:noFill/>
-          <a:ln/>
-        </p:spPr>
-        <p:txBody>
-          <a:bodyPr wrap="square" rtlCol="0" anchor="ctr"/>
-          <a:lstStyle/>
-          <a:p>
-            <a:pPr algn="l" indent="0" marL="0">
-              <a:buNone/>
-            </a:pPr>
-            <a:r>
-              <a:rPr lang="en-US" sz="2800" b="1" dirty="0">
-                <a:solidFill>
-                  <a:srgbClr val="FFFFFF"/>
-                </a:solidFill>
-                <a:latin typeface="Calibri" pitchFamily="34" charset="0"/>
-                <a:ea typeface="Calibri" pitchFamily="34" charset="-122"/>
-                <a:cs typeface="Calibri" pitchFamily="34" charset="-120"/>
-              </a:rPr>
-              <a:t>The HC-Nodes — 4 Parallel AI Analyzers</a:t>
-            </a:r>
-            <a:endParaRPr lang="en-US" sz="2800" dirty="0"/>
-          </a:p>
-        </p:txBody>
-      </p:sp>
-      <p:sp>
-        <p:nvSpPr>
-          <p:cNvPr id="4" name="Text 2"/>
-          <p:cNvSpPr/>
-          <p:nvPr/>
-        </p:nvSpPr>
-        <p:spPr>
-          <a:xfrm>
-            <a:off x="320040" y="694944"/>
-            <a:ext cx="11521440" cy="274320"/>
-          </a:xfrm>
-          <a:prstGeom prst="rect">
-            <a:avLst/>
-          </a:prstGeom>
-          <a:noFill/>
-          <a:ln/>
-        </p:spPr>
-        <p:txBody>
-          <a:bodyPr wrap="square" rtlCol="0" anchor="ctr"/>
-          <a:lstStyle/>
-          <a:p>
-            <a:pPr algn="l" indent="0" marL="0">
-              <a:buNone/>
-            </a:pPr>
-            <a:r>
-              <a:rPr lang="en-US" sz="1300" dirty="0">
-                <a:solidFill>
-                  <a:srgbClr val="00A896"/>
-                </a:solidFill>
-                <a:latin typeface="Calibri" pitchFamily="34" charset="0"/>
-                <a:ea typeface="Calibri" pitchFamily="34" charset="-122"/>
-                <a:cs typeface="Calibri" pitchFamily="34" charset="-120"/>
-              </a:rPr>
-              <a:t>Every document is processed simultaneously across all four nodes.</a:t>
-            </a:r>
-            <a:endParaRPr lang="en-US" sz="1300" dirty="0"/>
-          </a:p>
-        </p:txBody>
-      </p:sp>
-      <p:sp>
-        <p:nvSpPr>
-          <p:cNvPr id="5" name="Shape 3"/>
-          <p:cNvSpPr/>
-          <p:nvPr/>
-        </p:nvSpPr>
-        <p:spPr>
-          <a:xfrm>
-            <a:off x="347472" y="1051560"/>
-            <a:ext cx="2788920" cy="4434840"/>
-          </a:xfrm>
-          <a:prstGeom prst="rect">
-            <a:avLst/>
-          </a:prstGeom>
-          <a:solidFill>
-            <a:srgbClr val="FFFFFF">
-              <a:alpha val="6000"/>
-            </a:srgbClr>
-          </a:solidFill>
-          <a:ln w="12700">
-            <a:solidFill>
-              <a:srgbClr val="4A6FA5"/>
-            </a:solidFill>
-            <a:prstDash val="solid"/>
-          </a:ln>
-        </p:spPr>
-      </p:sp>
-      <p:sp>
-        <p:nvSpPr>
-          <p:cNvPr id="6" name="Shape 4"/>
-          <p:cNvSpPr/>
-          <p:nvPr/>
-        </p:nvSpPr>
-        <p:spPr>
-          <a:xfrm>
-            <a:off x="347472" y="1051560"/>
-            <a:ext cx="2788920" cy="713232"/>
-          </a:xfrm>
-          <a:prstGeom prst="rect">
-            <a:avLst/>
-          </a:prstGeom>
-          <a:solidFill>
-            <a:srgbClr val="4A6FA5">
-              <a:alpha val="95000"/>
-            </a:srgbClr>
-          </a:solidFill>
-          <a:ln w="12700">
-            <a:solidFill>
-              <a:srgbClr val="4A6FA5"/>
-            </a:solidFill>
-            <a:prstDash val="solid"/>
-          </a:ln>
-        </p:spPr>
-      </p:sp>
-      <p:sp>
-        <p:nvSpPr>
-          <p:cNvPr id="7" name="Text 5"/>
-          <p:cNvSpPr/>
-          <p:nvPr/>
-        </p:nvSpPr>
-        <p:spPr>
-          <a:xfrm>
-            <a:off x="438912" y="1124712"/>
-            <a:ext cx="411480" cy="502920"/>
-          </a:xfrm>
-          <a:prstGeom prst="rect">
-            <a:avLst/>
-          </a:prstGeom>
-          <a:noFill/>
-          <a:ln/>
-        </p:spPr>
-        <p:txBody>
-          <a:bodyPr wrap="square" rtlCol="0" anchor="ctr"/>
-          <a:lstStyle/>
-          <a:p>
-            <a:pPr algn="ctr" indent="0" marL="0">
-              <a:buNone/>
-            </a:pPr>
-            <a:r>
-              <a:rPr lang="en-US" sz="2000" dirty="0">
-                <a:solidFill>
-                  <a:srgbClr val="000000"/>
-                </a:solidFill>
-              </a:rPr>
-              <a:t>🔢</a:t>
-            </a:r>
-            <a:endParaRPr lang="en-US" sz="2000" dirty="0"/>
-          </a:p>
-        </p:txBody>
-      </p:sp>
-      <p:sp>
-        <p:nvSpPr>
-          <p:cNvPr id="8" name="Text 6"/>
-          <p:cNvSpPr/>
-          <p:nvPr/>
-        </p:nvSpPr>
-        <p:spPr>
-          <a:xfrm>
-            <a:off x="877824" y="1088136"/>
-            <a:ext cx="2167128" cy="347472"/>
-          </a:xfrm>
-          <a:prstGeom prst="rect">
-            <a:avLst/>
-          </a:prstGeom>
-          <a:noFill/>
-          <a:ln/>
-        </p:spPr>
-        <p:txBody>
-          <a:bodyPr wrap="square" rtlCol="0" anchor="ctr"/>
-          <a:lstStyle/>
-          <a:p>
-            <a:pPr indent="0" marL="0">
-              <a:buNone/>
-            </a:pPr>
-            <a:r>
-              <a:rPr lang="en-US" sz="1400" b="1" dirty="0">
-                <a:solidFill>
-                  <a:srgbClr val="FFFFFF"/>
-                </a:solidFill>
-                <a:latin typeface="Calibri" pitchFamily="34" charset="0"/>
-                <a:ea typeface="Calibri" pitchFamily="34" charset="-122"/>
-                <a:cs typeface="Calibri" pitchFamily="34" charset="-120"/>
-              </a:rPr>
-              <a:t>Coding Node</a:t>
-            </a:r>
-            <a:endParaRPr lang="en-US" sz="1400" dirty="0"/>
-          </a:p>
-        </p:txBody>
-      </p:sp>
-      <p:sp>
-        <p:nvSpPr>
-          <p:cNvPr id="9" name="Text 7"/>
-          <p:cNvSpPr/>
-          <p:nvPr/>
-        </p:nvSpPr>
-        <p:spPr>
-          <a:xfrm>
-            <a:off x="877824" y="1417320"/>
-            <a:ext cx="2167128" cy="274320"/>
-          </a:xfrm>
-          <a:prstGeom prst="rect">
-            <a:avLst/>
-          </a:prstGeom>
-          <a:noFill/>
-          <a:ln/>
-        </p:spPr>
-        <p:txBody>
-          <a:bodyPr wrap="square" rtlCol="0" anchor="ctr"/>
-          <a:lstStyle/>
-          <a:p>
-            <a:pPr indent="0" marL="0">
-              <a:buNone/>
-            </a:pPr>
-            <a:r>
-              <a:rPr lang="en-US" sz="950" dirty="0">
-                <a:solidFill>
-                  <a:srgbClr val="D4EEF8"/>
-                </a:solidFill>
-                <a:latin typeface="Calibri" pitchFamily="34" charset="0"/>
-                <a:ea typeface="Calibri" pitchFamily="34" charset="-122"/>
-                <a:cs typeface="Calibri" pitchFamily="34" charset="-120"/>
-              </a:rPr>
-              <a:t>Verifies CPT and ICD-10 accuracy</a:t>
-            </a:r>
-            <a:endParaRPr lang="en-US" sz="950" dirty="0"/>
-          </a:p>
-        </p:txBody>
-      </p:sp>
-      <p:sp>
-        <p:nvSpPr>
-          <p:cNvPr id="10" name="Text 8"/>
-          <p:cNvSpPr/>
-          <p:nvPr/>
-        </p:nvSpPr>
-        <p:spPr>
-          <a:xfrm>
-            <a:off x="484632" y="1892808"/>
-            <a:ext cx="2560320" cy="228600"/>
-          </a:xfrm>
-          <a:prstGeom prst="rect">
-            <a:avLst/>
-          </a:prstGeom>
-          <a:noFill/>
-          <a:ln/>
-        </p:spPr>
-        <p:txBody>
-          <a:bodyPr wrap="square" rtlCol="0" anchor="ctr"/>
-          <a:lstStyle/>
-          <a:p>
-            <a:pPr indent="0" marL="0">
-              <a:buNone/>
-            </a:pPr>
-            <a:r>
-              <a:rPr lang="en-US" sz="1000" b="1" dirty="0">
-                <a:solidFill>
-                  <a:srgbClr val="4A6FA5"/>
-                </a:solidFill>
-                <a:latin typeface="Calibri" pitchFamily="34" charset="0"/>
-                <a:ea typeface="Calibri" pitchFamily="34" charset="-122"/>
-                <a:cs typeface="Calibri" pitchFamily="34" charset="-120"/>
-              </a:rPr>
-              <a:t>What it catches:</a:t>
-            </a:r>
-            <a:endParaRPr lang="en-US" sz="1000" dirty="0"/>
-          </a:p>
-        </p:txBody>
-      </p:sp>
-      <p:sp>
-        <p:nvSpPr>
-          <p:cNvPr id="11" name="Shape 9"/>
-          <p:cNvSpPr/>
-          <p:nvPr/>
-        </p:nvSpPr>
-        <p:spPr>
-          <a:xfrm>
-            <a:off x="484632" y="2148840"/>
-            <a:ext cx="2514600" cy="438912"/>
-          </a:xfrm>
-          <a:prstGeom prst="rect">
-            <a:avLst/>
-          </a:prstGeom>
-          <a:solidFill>
-            <a:srgbClr val="FFFFFF">
-              <a:alpha val="12000"/>
-            </a:srgbClr>
-          </a:solidFill>
-          <a:ln w="6350">
-            <a:solidFill>
-              <a:srgbClr val="FFFFFF">
-                <a:alpha val="22000"/>
-              </a:srgbClr>
-            </a:solidFill>
-            <a:prstDash val="solid"/>
-          </a:ln>
-        </p:spPr>
-      </p:sp>
-      <p:sp>
-        <p:nvSpPr>
-          <p:cNvPr id="12" name="Shape 10"/>
-          <p:cNvSpPr/>
-          <p:nvPr/>
-        </p:nvSpPr>
-        <p:spPr>
-          <a:xfrm>
-            <a:off x="484632" y="2148840"/>
-            <a:ext cx="45720" cy="438912"/>
-          </a:xfrm>
-          <a:prstGeom prst="rect">
-            <a:avLst/>
-          </a:prstGeom>
-          <a:solidFill>
-            <a:srgbClr val="4A6FA5"/>
-          </a:solidFill>
-          <a:ln w="12700">
-            <a:solidFill>
-              <a:srgbClr val="4A6FA5"/>
-            </a:solidFill>
-            <a:prstDash val="solid"/>
-          </a:ln>
-        </p:spPr>
-      </p:sp>
-      <p:sp>
-        <p:nvSpPr>
-          <p:cNvPr id="13" name="Text 11"/>
-          <p:cNvSpPr/>
-          <p:nvPr/>
-        </p:nvSpPr>
-        <p:spPr>
-          <a:xfrm>
-            <a:off x="594360" y="2148840"/>
-            <a:ext cx="2377440" cy="438912"/>
-          </a:xfrm>
-          <a:prstGeom prst="rect">
-            <a:avLst/>
-          </a:prstGeom>
-          <a:noFill/>
-          <a:ln/>
-        </p:spPr>
-        <p:txBody>
-          <a:bodyPr wrap="square" rtlCol="0" anchor="ctr"/>
-          <a:lstStyle/>
-          <a:p>
-            <a:pPr indent="0" marL="0">
-              <a:buNone/>
-            </a:pPr>
-            <a:r>
-              <a:rPr lang="en-US" sz="1000" dirty="0">
-                <a:solidFill>
-                  <a:srgbClr val="FFFFFF"/>
-                </a:solidFill>
-                <a:latin typeface="Calibri" pitchFamily="34" charset="0"/>
-                <a:ea typeface="Calibri" pitchFamily="34" charset="-122"/>
-                <a:cs typeface="Calibri" pitchFamily="34" charset="-120"/>
-              </a:rPr>
-              <a:t>Wrong or missing procedure codes</a:t>
-            </a:r>
-            <a:endParaRPr lang="en-US" sz="1000" dirty="0"/>
-          </a:p>
-        </p:txBody>
-      </p:sp>
-      <p:sp>
-        <p:nvSpPr>
-          <p:cNvPr id="14" name="Shape 12"/>
-          <p:cNvSpPr/>
-          <p:nvPr/>
-        </p:nvSpPr>
-        <p:spPr>
-          <a:xfrm>
-            <a:off x="484632" y="2660904"/>
-            <a:ext cx="2514600" cy="438912"/>
-          </a:xfrm>
-          <a:prstGeom prst="rect">
-            <a:avLst/>
-          </a:prstGeom>
-          <a:solidFill>
-            <a:srgbClr val="FFFFFF">
-              <a:alpha val="12000"/>
-            </a:srgbClr>
-          </a:solidFill>
-          <a:ln w="6350">
-            <a:solidFill>
-              <a:srgbClr val="FFFFFF">
-                <a:alpha val="22000"/>
-              </a:srgbClr>
-            </a:solidFill>
-            <a:prstDash val="solid"/>
-          </a:ln>
-        </p:spPr>
-      </p:sp>
-      <p:sp>
-        <p:nvSpPr>
-          <p:cNvPr id="15" name="Shape 13"/>
-          <p:cNvSpPr/>
-          <p:nvPr/>
-        </p:nvSpPr>
-        <p:spPr>
-          <a:xfrm>
-            <a:off x="484632" y="2660904"/>
-            <a:ext cx="45720" cy="438912"/>
-          </a:xfrm>
-          <a:prstGeom prst="rect">
-            <a:avLst/>
-          </a:prstGeom>
-          <a:solidFill>
-            <a:srgbClr val="4A6FA5"/>
-          </a:solidFill>
-          <a:ln w="12700">
-            <a:solidFill>
-              <a:srgbClr val="4A6FA5"/>
-            </a:solidFill>
-            <a:prstDash val="solid"/>
-          </a:ln>
-        </p:spPr>
-      </p:sp>
-      <p:sp>
-        <p:nvSpPr>
-          <p:cNvPr id="16" name="Text 14"/>
-          <p:cNvSpPr/>
-          <p:nvPr/>
-        </p:nvSpPr>
-        <p:spPr>
-          <a:xfrm>
-            <a:off x="594360" y="2660904"/>
-            <a:ext cx="2377440" cy="438912"/>
-          </a:xfrm>
-          <a:prstGeom prst="rect">
-            <a:avLst/>
-          </a:prstGeom>
-          <a:noFill/>
-          <a:ln/>
-        </p:spPr>
-        <p:txBody>
-          <a:bodyPr wrap="square" rtlCol="0" anchor="ctr"/>
-          <a:lstStyle/>
-          <a:p>
-            <a:pPr indent="0" marL="0">
-              <a:buNone/>
-            </a:pPr>
-            <a:r>
-              <a:rPr lang="en-US" sz="1000" dirty="0">
-                <a:solidFill>
-                  <a:srgbClr val="FFFFFF"/>
-                </a:solidFill>
-                <a:latin typeface="Calibri" pitchFamily="34" charset="0"/>
-                <a:ea typeface="Calibri" pitchFamily="34" charset="-122"/>
-                <a:cs typeface="Calibri" pitchFamily="34" charset="-120"/>
-              </a:rPr>
-              <a:t>Diagnosis-procedure conflicts</a:t>
-            </a:r>
-            <a:endParaRPr lang="en-US" sz="1000" dirty="0"/>
-          </a:p>
-        </p:txBody>
-      </p:sp>
-      <p:sp>
-        <p:nvSpPr>
-          <p:cNvPr id="17" name="Shape 15"/>
-          <p:cNvSpPr/>
-          <p:nvPr/>
-        </p:nvSpPr>
-        <p:spPr>
-          <a:xfrm>
-            <a:off x="484632" y="3172968"/>
-            <a:ext cx="2514600" cy="438912"/>
-          </a:xfrm>
-          <a:prstGeom prst="rect">
-            <a:avLst/>
-          </a:prstGeom>
-          <a:solidFill>
-            <a:srgbClr val="FFFFFF">
-              <a:alpha val="12000"/>
-            </a:srgbClr>
-          </a:solidFill>
-          <a:ln w="6350">
-            <a:solidFill>
-              <a:srgbClr val="FFFFFF">
-                <a:alpha val="22000"/>
-              </a:srgbClr>
-            </a:solidFill>
-            <a:prstDash val="solid"/>
-          </a:ln>
-        </p:spPr>
-      </p:sp>
-      <p:sp>
-        <p:nvSpPr>
-          <p:cNvPr id="18" name="Shape 16"/>
-          <p:cNvSpPr/>
-          <p:nvPr/>
-        </p:nvSpPr>
-        <p:spPr>
-          <a:xfrm>
-            <a:off x="484632" y="3172968"/>
-            <a:ext cx="45720" cy="438912"/>
-          </a:xfrm>
-          <a:prstGeom prst="rect">
-            <a:avLst/>
-          </a:prstGeom>
-          <a:solidFill>
-            <a:srgbClr val="4A6FA5"/>
-          </a:solidFill>
-          <a:ln w="12700">
-            <a:solidFill>
-              <a:srgbClr val="4A6FA5"/>
-            </a:solidFill>
-            <a:prstDash val="solid"/>
-          </a:ln>
-        </p:spPr>
-      </p:sp>
-      <p:sp>
-        <p:nvSpPr>
-          <p:cNvPr id="19" name="Text 17"/>
-          <p:cNvSpPr/>
-          <p:nvPr/>
-        </p:nvSpPr>
-        <p:spPr>
-          <a:xfrm>
-            <a:off x="594360" y="3172968"/>
-            <a:ext cx="2377440" cy="438912"/>
-          </a:xfrm>
-          <a:prstGeom prst="rect">
-            <a:avLst/>
-          </a:prstGeom>
-          <a:noFill/>
-          <a:ln/>
-        </p:spPr>
-        <p:txBody>
-          <a:bodyPr wrap="square" rtlCol="0" anchor="ctr"/>
-          <a:lstStyle/>
-          <a:p>
-            <a:pPr indent="0" marL="0">
-              <a:buNone/>
-            </a:pPr>
-            <a:r>
-              <a:rPr lang="en-US" sz="1000" dirty="0">
-                <a:solidFill>
-                  <a:srgbClr val="FFFFFF"/>
-                </a:solidFill>
-                <a:latin typeface="Calibri" pitchFamily="34" charset="0"/>
-                <a:ea typeface="Calibri" pitchFamily="34" charset="-122"/>
-                <a:cs typeface="Calibri" pitchFamily="34" charset="-120"/>
-              </a:rPr>
-              <a:t>Modifier errors and bundling issues</a:t>
-            </a:r>
-            <a:endParaRPr lang="en-US" sz="1000" dirty="0"/>
-          </a:p>
-        </p:txBody>
-      </p:sp>
-      <p:sp>
-        <p:nvSpPr>
-          <p:cNvPr id="20" name="Shape 18"/>
-          <p:cNvSpPr/>
-          <p:nvPr/>
-        </p:nvSpPr>
-        <p:spPr>
-          <a:xfrm>
-            <a:off x="484632" y="3685032"/>
-            <a:ext cx="2514600" cy="438912"/>
-          </a:xfrm>
-          <a:prstGeom prst="rect">
-            <a:avLst/>
-          </a:prstGeom>
-          <a:solidFill>
-            <a:srgbClr val="FFFFFF">
-              <a:alpha val="12000"/>
-            </a:srgbClr>
-          </a:solidFill>
-          <a:ln w="6350">
-            <a:solidFill>
-              <a:srgbClr val="FFFFFF">
-                <a:alpha val="22000"/>
-              </a:srgbClr>
-            </a:solidFill>
-            <a:prstDash val="solid"/>
-          </a:ln>
-        </p:spPr>
-      </p:sp>
-      <p:sp>
-        <p:nvSpPr>
-          <p:cNvPr id="21" name="Shape 19"/>
-          <p:cNvSpPr/>
-          <p:nvPr/>
-        </p:nvSpPr>
-        <p:spPr>
-          <a:xfrm>
-            <a:off x="484632" y="3685032"/>
-            <a:ext cx="45720" cy="438912"/>
-          </a:xfrm>
-          <a:prstGeom prst="rect">
-            <a:avLst/>
-          </a:prstGeom>
-          <a:solidFill>
-            <a:srgbClr val="4A6FA5"/>
-          </a:solidFill>
-          <a:ln w="12700">
-            <a:solidFill>
-              <a:srgbClr val="4A6FA5"/>
-            </a:solidFill>
-            <a:prstDash val="solid"/>
-          </a:ln>
-        </p:spPr>
-      </p:sp>
-      <p:sp>
-        <p:nvSpPr>
-          <p:cNvPr id="22" name="Text 20"/>
-          <p:cNvSpPr/>
-          <p:nvPr/>
-        </p:nvSpPr>
-        <p:spPr>
-          <a:xfrm>
-            <a:off x="594360" y="3685032"/>
-            <a:ext cx="2377440" cy="438912"/>
-          </a:xfrm>
-          <a:prstGeom prst="rect">
-            <a:avLst/>
-          </a:prstGeom>
-          <a:noFill/>
-          <a:ln/>
-        </p:spPr>
-        <p:txBody>
-          <a:bodyPr wrap="square" rtlCol="0" anchor="ctr"/>
-          <a:lstStyle/>
-          <a:p>
-            <a:pPr indent="0" marL="0">
-              <a:buNone/>
-            </a:pPr>
-            <a:r>
-              <a:rPr lang="en-US" sz="1000" dirty="0">
-                <a:solidFill>
-                  <a:srgbClr val="FFFFFF"/>
-                </a:solidFill>
-                <a:latin typeface="Calibri" pitchFamily="34" charset="0"/>
-                <a:ea typeface="Calibri" pitchFamily="34" charset="-122"/>
-                <a:cs typeface="Calibri" pitchFamily="34" charset="-120"/>
-              </a:rPr>
-              <a:t>DRG accuracy for inpatient billing</a:t>
-            </a:r>
-            <a:endParaRPr lang="en-US" sz="1000" dirty="0"/>
-          </a:p>
-        </p:txBody>
-      </p:sp>
-      <p:sp>
-        <p:nvSpPr>
-          <p:cNvPr id="23" name="Shape 21"/>
-          <p:cNvSpPr/>
-          <p:nvPr/>
-        </p:nvSpPr>
-        <p:spPr>
-          <a:xfrm>
-            <a:off x="438912" y="4389120"/>
-            <a:ext cx="2606040" cy="987552"/>
-          </a:xfrm>
-          <a:prstGeom prst="rect">
-            <a:avLst/>
-          </a:prstGeom>
-          <a:solidFill>
-            <a:srgbClr val="4A6FA5">
-              <a:alpha val="18000"/>
-            </a:srgbClr>
-          </a:solidFill>
-          <a:ln w="6350">
-            <a:solidFill>
-              <a:srgbClr val="4A6FA5"/>
-            </a:solidFill>
-            <a:prstDash val="solid"/>
-          </a:ln>
-        </p:spPr>
-      </p:sp>
-      <p:sp>
-        <p:nvSpPr>
-          <p:cNvPr id="24" name="Text 22"/>
-          <p:cNvSpPr/>
-          <p:nvPr/>
-        </p:nvSpPr>
-        <p:spPr>
-          <a:xfrm>
-            <a:off x="512064" y="4453128"/>
-            <a:ext cx="2468880" cy="201168"/>
-          </a:xfrm>
-          <a:prstGeom prst="rect">
-            <a:avLst/>
-          </a:prstGeom>
-          <a:noFill/>
-          <a:ln/>
-        </p:spPr>
-        <p:txBody>
-          <a:bodyPr wrap="square" rtlCol="0" anchor="ctr"/>
-          <a:lstStyle/>
-          <a:p>
-            <a:pPr indent="0" marL="0">
-              <a:buNone/>
-            </a:pPr>
-            <a:r>
-              <a:rPr lang="en-US" sz="900" b="1" dirty="0">
-                <a:solidFill>
-                  <a:srgbClr val="4A6FA5"/>
-                </a:solidFill>
-                <a:latin typeface="Calibri" pitchFamily="34" charset="0"/>
-                <a:ea typeface="Calibri" pitchFamily="34" charset="-122"/>
-                <a:cs typeface="Calibri" pitchFamily="34" charset="-120"/>
-              </a:rPr>
-              <a:t>Example:</a:t>
-            </a:r>
-            <a:endParaRPr lang="en-US" sz="900" dirty="0"/>
-          </a:p>
-        </p:txBody>
-      </p:sp>
-      <p:sp>
-        <p:nvSpPr>
-          <p:cNvPr id="25" name="Text 23"/>
-          <p:cNvSpPr/>
-          <p:nvPr/>
-        </p:nvSpPr>
-        <p:spPr>
-          <a:xfrm>
-            <a:off x="512064" y="4654296"/>
-            <a:ext cx="2468880" cy="640080"/>
-          </a:xfrm>
-          <a:prstGeom prst="rect">
-            <a:avLst/>
-          </a:prstGeom>
-          <a:noFill/>
-          <a:ln/>
-        </p:spPr>
-        <p:txBody>
-          <a:bodyPr wrap="square" rtlCol="0" anchor="ctr"/>
-          <a:lstStyle/>
-          <a:p>
-            <a:pPr indent="0" marL="0">
-              <a:lnSpc>
-                <a:spcPct val="125000"/>
-              </a:lnSpc>
-              <a:buNone/>
-            </a:pPr>
-            <a:r>
-              <a:rPr lang="en-US" sz="950" i="1" dirty="0">
-                <a:solidFill>
-                  <a:srgbClr val="FFFFFF"/>
-                </a:solidFill>
-                <a:latin typeface="Calibri" pitchFamily="34" charset="0"/>
-                <a:ea typeface="Calibri" pitchFamily="34" charset="-122"/>
-                <a:cs typeface="Calibri" pitchFamily="34" charset="-120"/>
-              </a:rPr>
-              <a:t>Prior Auth: CPT 27447 + M17.11 verified. No modifier needed. Clean.</a:t>
-            </a:r>
-            <a:endParaRPr lang="en-US" sz="950" dirty="0"/>
-          </a:p>
-        </p:txBody>
-      </p:sp>
-      <p:sp>
-        <p:nvSpPr>
-          <p:cNvPr id="26" name="Shape 24"/>
-          <p:cNvSpPr/>
-          <p:nvPr/>
-        </p:nvSpPr>
-        <p:spPr>
-          <a:xfrm>
-            <a:off x="3227832" y="1051560"/>
-            <a:ext cx="2788920" cy="4434840"/>
-          </a:xfrm>
-          <a:prstGeom prst="rect">
-            <a:avLst/>
-          </a:prstGeom>
-          <a:solidFill>
-            <a:srgbClr val="FFFFFF">
-              <a:alpha val="6000"/>
-            </a:srgbClr>
-          </a:solidFill>
-          <a:ln w="12700">
-            <a:solidFill>
-              <a:srgbClr val="00A896"/>
-            </a:solidFill>
-            <a:prstDash val="solid"/>
-          </a:ln>
-        </p:spPr>
-      </p:sp>
-      <p:sp>
-        <p:nvSpPr>
-          <p:cNvPr id="27" name="Shape 25"/>
-          <p:cNvSpPr/>
-          <p:nvPr/>
-        </p:nvSpPr>
-        <p:spPr>
-          <a:xfrm>
-            <a:off x="3227832" y="1051560"/>
-            <a:ext cx="2788920" cy="713232"/>
-          </a:xfrm>
-          <a:prstGeom prst="rect">
-            <a:avLst/>
-          </a:prstGeom>
-          <a:solidFill>
-            <a:srgbClr val="00A896">
-              <a:alpha val="95000"/>
-            </a:srgbClr>
-          </a:solidFill>
-          <a:ln w="12700">
-            <a:solidFill>
-              <a:srgbClr val="00A896"/>
-            </a:solidFill>
-            <a:prstDash val="solid"/>
-          </a:ln>
-        </p:spPr>
-      </p:sp>
-      <p:sp>
-        <p:nvSpPr>
-          <p:cNvPr id="28" name="Text 26"/>
-          <p:cNvSpPr/>
-          <p:nvPr/>
-        </p:nvSpPr>
-        <p:spPr>
-          <a:xfrm>
-            <a:off x="3319272" y="1124712"/>
-            <a:ext cx="411480" cy="502920"/>
-          </a:xfrm>
-          <a:prstGeom prst="rect">
-            <a:avLst/>
-          </a:prstGeom>
-          <a:noFill/>
-          <a:ln/>
-        </p:spPr>
-        <p:txBody>
-          <a:bodyPr wrap="square" rtlCol="0" anchor="ctr"/>
-          <a:lstStyle/>
-          <a:p>
-            <a:pPr algn="ctr" indent="0" marL="0">
-              <a:buNone/>
-            </a:pPr>
-            <a:r>
-              <a:rPr lang="en-US" sz="2000" dirty="0">
-                <a:solidFill>
-                  <a:srgbClr val="000000"/>
-                </a:solidFill>
-              </a:rPr>
-              <a:t>📋</a:t>
-            </a:r>
-            <a:endParaRPr lang="en-US" sz="2000" dirty="0"/>
-          </a:p>
-        </p:txBody>
-      </p:sp>
-      <p:sp>
-        <p:nvSpPr>
-          <p:cNvPr id="29" name="Text 27"/>
-          <p:cNvSpPr/>
-          <p:nvPr/>
-        </p:nvSpPr>
-        <p:spPr>
-          <a:xfrm>
-            <a:off x="3758184" y="1088136"/>
-            <a:ext cx="2167128" cy="347472"/>
-          </a:xfrm>
-          <a:prstGeom prst="rect">
-            <a:avLst/>
-          </a:prstGeom>
-          <a:noFill/>
-          <a:ln/>
-        </p:spPr>
-        <p:txBody>
-          <a:bodyPr wrap="square" rtlCol="0" anchor="ctr"/>
-          <a:lstStyle/>
-          <a:p>
-            <a:pPr indent="0" marL="0">
-              <a:buNone/>
-            </a:pPr>
-            <a:r>
-              <a:rPr lang="en-US" sz="1400" b="1" dirty="0">
-                <a:solidFill>
-                  <a:srgbClr val="FFFFFF"/>
-                </a:solidFill>
-                <a:latin typeface="Calibri" pitchFamily="34" charset="0"/>
-                <a:ea typeface="Calibri" pitchFamily="34" charset="-122"/>
-                <a:cs typeface="Calibri" pitchFamily="34" charset="-120"/>
-              </a:rPr>
-              <a:t>Compliance Node</a:t>
-            </a:r>
-            <a:endParaRPr lang="en-US" sz="1400" dirty="0"/>
-          </a:p>
-        </p:txBody>
-      </p:sp>
-      <p:sp>
-        <p:nvSpPr>
-          <p:cNvPr id="30" name="Text 28"/>
-          <p:cNvSpPr/>
-          <p:nvPr/>
-        </p:nvSpPr>
-        <p:spPr>
-          <a:xfrm>
-            <a:off x="3758184" y="1417320"/>
-            <a:ext cx="2167128" cy="274320"/>
-          </a:xfrm>
-          <a:prstGeom prst="rect">
-            <a:avLst/>
-          </a:prstGeom>
-          <a:noFill/>
-          <a:ln/>
-        </p:spPr>
-        <p:txBody>
-          <a:bodyPr wrap="square" rtlCol="0" anchor="ctr"/>
-          <a:lstStyle/>
-          <a:p>
-            <a:pPr indent="0" marL="0">
-              <a:buNone/>
-            </a:pPr>
-            <a:r>
-              <a:rPr lang="en-US" sz="950" dirty="0">
-                <a:solidFill>
-                  <a:srgbClr val="D4EEF8"/>
-                </a:solidFill>
-                <a:latin typeface="Calibri" pitchFamily="34" charset="0"/>
-                <a:ea typeface="Calibri" pitchFamily="34" charset="-122"/>
-                <a:cs typeface="Calibri" pitchFamily="34" charset="-120"/>
-              </a:rPr>
-              <a:t>Checks regulatory and payer requirements</a:t>
-            </a:r>
-            <a:endParaRPr lang="en-US" sz="950" dirty="0"/>
-          </a:p>
-        </p:txBody>
-      </p:sp>
-      <p:sp>
-        <p:nvSpPr>
-          <p:cNvPr id="31" name="Text 29"/>
-          <p:cNvSpPr/>
-          <p:nvPr/>
-        </p:nvSpPr>
-        <p:spPr>
-          <a:xfrm>
-            <a:off x="3364992" y="1892808"/>
-            <a:ext cx="2560320" cy="228600"/>
-          </a:xfrm>
-          <a:prstGeom prst="rect">
-            <a:avLst/>
-          </a:prstGeom>
-          <a:noFill/>
-          <a:ln/>
-        </p:spPr>
-        <p:txBody>
-          <a:bodyPr wrap="square" rtlCol="0" anchor="ctr"/>
-          <a:lstStyle/>
-          <a:p>
-            <a:pPr indent="0" marL="0">
-              <a:buNone/>
-            </a:pPr>
-            <a:r>
-              <a:rPr lang="en-US" sz="1000" b="1" dirty="0">
-                <a:solidFill>
-                  <a:srgbClr val="00A896"/>
-                </a:solidFill>
-                <a:latin typeface="Calibri" pitchFamily="34" charset="0"/>
-                <a:ea typeface="Calibri" pitchFamily="34" charset="-122"/>
-                <a:cs typeface="Calibri" pitchFamily="34" charset="-120"/>
-              </a:rPr>
-              <a:t>What it catches:</a:t>
-            </a:r>
-            <a:endParaRPr lang="en-US" sz="1000" dirty="0"/>
-          </a:p>
-        </p:txBody>
-      </p:sp>
-      <p:sp>
-        <p:nvSpPr>
-          <p:cNvPr id="32" name="Shape 30"/>
-          <p:cNvSpPr/>
-          <p:nvPr/>
-        </p:nvSpPr>
-        <p:spPr>
-          <a:xfrm>
-            <a:off x="3364992" y="2148840"/>
-            <a:ext cx="2514600" cy="438912"/>
-          </a:xfrm>
-          <a:prstGeom prst="rect">
-            <a:avLst/>
-          </a:prstGeom>
-          <a:solidFill>
-            <a:srgbClr val="FFFFFF">
-              <a:alpha val="12000"/>
-            </a:srgbClr>
-          </a:solidFill>
-          <a:ln w="6350">
-            <a:solidFill>
-              <a:srgbClr val="FFFFFF">
-                <a:alpha val="22000"/>
-              </a:srgbClr>
-            </a:solidFill>
-            <a:prstDash val="solid"/>
-          </a:ln>
-        </p:spPr>
-      </p:sp>
-      <p:sp>
-        <p:nvSpPr>
-          <p:cNvPr id="33" name="Shape 31"/>
-          <p:cNvSpPr/>
-          <p:nvPr/>
-        </p:nvSpPr>
-        <p:spPr>
-          <a:xfrm>
-            <a:off x="3364992" y="2148840"/>
-            <a:ext cx="45720" cy="438912"/>
-          </a:xfrm>
-          <a:prstGeom prst="rect">
-            <a:avLst/>
-          </a:prstGeom>
-          <a:solidFill>
-            <a:srgbClr val="00A896"/>
-          </a:solidFill>
-          <a:ln w="12700">
-            <a:solidFill>
-              <a:srgbClr val="00A896"/>
-            </a:solidFill>
-            <a:prstDash val="solid"/>
-          </a:ln>
-        </p:spPr>
-      </p:sp>
-      <p:sp>
-        <p:nvSpPr>
-          <p:cNvPr id="34" name="Text 32"/>
-          <p:cNvSpPr/>
-          <p:nvPr/>
-        </p:nvSpPr>
-        <p:spPr>
-          <a:xfrm>
-            <a:off x="3474720" y="2148840"/>
-            <a:ext cx="2377440" cy="438912"/>
-          </a:xfrm>
-          <a:prstGeom prst="rect">
-            <a:avLst/>
-          </a:prstGeom>
-          <a:noFill/>
-          <a:ln/>
-        </p:spPr>
-        <p:txBody>
-          <a:bodyPr wrap="square" rtlCol="0" anchor="ctr"/>
-          <a:lstStyle/>
-          <a:p>
-            <a:pPr indent="0" marL="0">
-              <a:buNone/>
-            </a:pPr>
-            <a:r>
-              <a:rPr lang="en-US" sz="1000" dirty="0">
-                <a:solidFill>
-                  <a:srgbClr val="FFFFFF"/>
-                </a:solidFill>
-                <a:latin typeface="Calibri" pitchFamily="34" charset="0"/>
-                <a:ea typeface="Calibri" pitchFamily="34" charset="-122"/>
-                <a:cs typeface="Calibri" pitchFamily="34" charset="-120"/>
-              </a:rPr>
-              <a:t>Missing required fields by payer</a:t>
-            </a:r>
-            <a:endParaRPr lang="en-US" sz="1000" dirty="0"/>
-          </a:p>
-        </p:txBody>
-      </p:sp>
-      <p:sp>
-        <p:nvSpPr>
-          <p:cNvPr id="35" name="Shape 33"/>
-          <p:cNvSpPr/>
-          <p:nvPr/>
-        </p:nvSpPr>
-        <p:spPr>
-          <a:xfrm>
-            <a:off x="3364992" y="2660904"/>
-            <a:ext cx="2514600" cy="438912"/>
-          </a:xfrm>
-          <a:prstGeom prst="rect">
-            <a:avLst/>
-          </a:prstGeom>
-          <a:solidFill>
-            <a:srgbClr val="FFFFFF">
-              <a:alpha val="12000"/>
-            </a:srgbClr>
-          </a:solidFill>
-          <a:ln w="6350">
-            <a:solidFill>
-              <a:srgbClr val="FFFFFF">
-                <a:alpha val="22000"/>
-              </a:srgbClr>
-            </a:solidFill>
-            <a:prstDash val="solid"/>
-          </a:ln>
-        </p:spPr>
-      </p:sp>
-      <p:sp>
-        <p:nvSpPr>
-          <p:cNvPr id="36" name="Shape 34"/>
-          <p:cNvSpPr/>
-          <p:nvPr/>
-        </p:nvSpPr>
-        <p:spPr>
-          <a:xfrm>
-            <a:off x="3364992" y="2660904"/>
-            <a:ext cx="45720" cy="438912"/>
-          </a:xfrm>
-          <a:prstGeom prst="rect">
-            <a:avLst/>
-          </a:prstGeom>
-          <a:solidFill>
-            <a:srgbClr val="00A896"/>
-          </a:solidFill>
-          <a:ln w="12700">
-            <a:solidFill>
-              <a:srgbClr val="00A896"/>
-            </a:solidFill>
-            <a:prstDash val="solid"/>
-          </a:ln>
-        </p:spPr>
-      </p:sp>
-      <p:sp>
-        <p:nvSpPr>
-          <p:cNvPr id="37" name="Text 35"/>
-          <p:cNvSpPr/>
-          <p:nvPr/>
-        </p:nvSpPr>
-        <p:spPr>
-          <a:xfrm>
-            <a:off x="3474720" y="2660904"/>
-            <a:ext cx="2377440" cy="438912"/>
-          </a:xfrm>
-          <a:prstGeom prst="rect">
-            <a:avLst/>
-          </a:prstGeom>
-          <a:noFill/>
-          <a:ln/>
-        </p:spPr>
-        <p:txBody>
-          <a:bodyPr wrap="square" rtlCol="0" anchor="ctr"/>
-          <a:lstStyle/>
-          <a:p>
-            <a:pPr indent="0" marL="0">
-              <a:buNone/>
-            </a:pPr>
-            <a:r>
-              <a:rPr lang="en-US" sz="1000" dirty="0">
-                <a:solidFill>
-                  <a:srgbClr val="FFFFFF"/>
-                </a:solidFill>
-                <a:latin typeface="Calibri" pitchFamily="34" charset="0"/>
-                <a:ea typeface="Calibri" pitchFamily="34" charset="-122"/>
-                <a:cs typeface="Calibri" pitchFamily="34" charset="-120"/>
-              </a:rPr>
-              <a:t>Insurance policy status</a:t>
-            </a:r>
-            <a:endParaRPr lang="en-US" sz="1000" dirty="0"/>
-          </a:p>
-        </p:txBody>
-      </p:sp>
-      <p:sp>
-        <p:nvSpPr>
-          <p:cNvPr id="38" name="Shape 36"/>
-          <p:cNvSpPr/>
-          <p:nvPr/>
-        </p:nvSpPr>
-        <p:spPr>
-          <a:xfrm>
-            <a:off x="3364992" y="3172968"/>
-            <a:ext cx="2514600" cy="438912"/>
-          </a:xfrm>
-          <a:prstGeom prst="rect">
-            <a:avLst/>
-          </a:prstGeom>
-          <a:solidFill>
-            <a:srgbClr val="FFFFFF">
-              <a:alpha val="12000"/>
-            </a:srgbClr>
-          </a:solidFill>
-          <a:ln w="6350">
-            <a:solidFill>
-              <a:srgbClr val="FFFFFF">
-                <a:alpha val="22000"/>
-              </a:srgbClr>
-            </a:solidFill>
-            <a:prstDash val="solid"/>
-          </a:ln>
-        </p:spPr>
-      </p:sp>
-      <p:sp>
-        <p:nvSpPr>
-          <p:cNvPr id="39" name="Shape 37"/>
-          <p:cNvSpPr/>
-          <p:nvPr/>
-        </p:nvSpPr>
-        <p:spPr>
-          <a:xfrm>
-            <a:off x="3364992" y="3172968"/>
-            <a:ext cx="45720" cy="438912"/>
-          </a:xfrm>
-          <a:prstGeom prst="rect">
-            <a:avLst/>
-          </a:prstGeom>
-          <a:solidFill>
-            <a:srgbClr val="00A896"/>
-          </a:solidFill>
-          <a:ln w="12700">
-            <a:solidFill>
-              <a:srgbClr val="00A896"/>
-            </a:solidFill>
-            <a:prstDash val="solid"/>
-          </a:ln>
-        </p:spPr>
-      </p:sp>
-      <p:sp>
-        <p:nvSpPr>
-          <p:cNvPr id="40" name="Text 38"/>
-          <p:cNvSpPr/>
-          <p:nvPr/>
-        </p:nvSpPr>
-        <p:spPr>
-          <a:xfrm>
-            <a:off x="3474720" y="3172968"/>
-            <a:ext cx="2377440" cy="438912"/>
-          </a:xfrm>
-          <a:prstGeom prst="rect">
-            <a:avLst/>
-          </a:prstGeom>
-          <a:noFill/>
-          <a:ln/>
-        </p:spPr>
-        <p:txBody>
-          <a:bodyPr wrap="square" rtlCol="0" anchor="ctr"/>
-          <a:lstStyle/>
-          <a:p>
-            <a:pPr indent="0" marL="0">
-              <a:buNone/>
-            </a:pPr>
-            <a:r>
-              <a:rPr lang="en-US" sz="1000" dirty="0">
-                <a:solidFill>
-                  <a:srgbClr val="FFFFFF"/>
-                </a:solidFill>
-                <a:latin typeface="Calibri" pitchFamily="34" charset="0"/>
-                <a:ea typeface="Calibri" pitchFamily="34" charset="-122"/>
-                <a:cs typeface="Calibri" pitchFamily="34" charset="-120"/>
-              </a:rPr>
-              <a:t>Consent documentation standards</a:t>
-            </a:r>
-            <a:endParaRPr lang="en-US" sz="1000" dirty="0"/>
-          </a:p>
-        </p:txBody>
-      </p:sp>
-      <p:sp>
-        <p:nvSpPr>
-          <p:cNvPr id="41" name="Shape 39"/>
-          <p:cNvSpPr/>
-          <p:nvPr/>
-        </p:nvSpPr>
-        <p:spPr>
-          <a:xfrm>
-            <a:off x="3364992" y="3685032"/>
-            <a:ext cx="2514600" cy="438912"/>
-          </a:xfrm>
-          <a:prstGeom prst="rect">
-            <a:avLst/>
-          </a:prstGeom>
-          <a:solidFill>
-            <a:srgbClr val="FFFFFF">
-              <a:alpha val="12000"/>
-            </a:srgbClr>
-          </a:solidFill>
-          <a:ln w="6350">
-            <a:solidFill>
-              <a:srgbClr val="FFFFFF">
-                <a:alpha val="22000"/>
-              </a:srgbClr>
-            </a:solidFill>
-            <a:prstDash val="solid"/>
-          </a:ln>
-        </p:spPr>
-      </p:sp>
-      <p:sp>
-        <p:nvSpPr>
-          <p:cNvPr id="42" name="Shape 40"/>
-          <p:cNvSpPr/>
-          <p:nvPr/>
-        </p:nvSpPr>
-        <p:spPr>
-          <a:xfrm>
-            <a:off x="3364992" y="3685032"/>
-            <a:ext cx="45720" cy="438912"/>
-          </a:xfrm>
-          <a:prstGeom prst="rect">
-            <a:avLst/>
-          </a:prstGeom>
-          <a:solidFill>
-            <a:srgbClr val="00A896"/>
-          </a:solidFill>
-          <a:ln w="12700">
-            <a:solidFill>
-              <a:srgbClr val="00A896"/>
-            </a:solidFill>
-            <a:prstDash val="solid"/>
-          </a:ln>
-        </p:spPr>
-      </p:sp>
-      <p:sp>
-        <p:nvSpPr>
-          <p:cNvPr id="43" name="Text 41"/>
-          <p:cNvSpPr/>
-          <p:nvPr/>
-        </p:nvSpPr>
-        <p:spPr>
-          <a:xfrm>
-            <a:off x="3474720" y="3685032"/>
-            <a:ext cx="2377440" cy="438912"/>
-          </a:xfrm>
-          <a:prstGeom prst="rect">
-            <a:avLst/>
-          </a:prstGeom>
-          <a:noFill/>
-          <a:ln/>
-        </p:spPr>
-        <p:txBody>
-          <a:bodyPr wrap="square" rtlCol="0" anchor="ctr"/>
-          <a:lstStyle/>
-          <a:p>
-            <a:pPr indent="0" marL="0">
-              <a:buNone/>
-            </a:pPr>
-            <a:r>
-              <a:rPr lang="en-US" sz="1000" dirty="0">
-                <a:solidFill>
-                  <a:srgbClr val="FFFFFF"/>
-                </a:solidFill>
-                <a:latin typeface="Calibri" pitchFamily="34" charset="0"/>
-                <a:ea typeface="Calibri" pitchFamily="34" charset="-122"/>
-                <a:cs typeface="Calibri" pitchFamily="34" charset="-120"/>
-              </a:rPr>
-              <a:t>CMS core measure compliance</a:t>
-            </a:r>
-            <a:endParaRPr lang="en-US" sz="1000" dirty="0"/>
-          </a:p>
-        </p:txBody>
-      </p:sp>
-      <p:sp>
-        <p:nvSpPr>
-          <p:cNvPr id="44" name="Shape 42"/>
-          <p:cNvSpPr/>
-          <p:nvPr/>
-        </p:nvSpPr>
-        <p:spPr>
-          <a:xfrm>
-            <a:off x="3319272" y="4389120"/>
-            <a:ext cx="2606040" cy="987552"/>
-          </a:xfrm>
-          <a:prstGeom prst="rect">
-            <a:avLst/>
-          </a:prstGeom>
-          <a:solidFill>
-            <a:srgbClr val="00A896">
-              <a:alpha val="18000"/>
-            </a:srgbClr>
-          </a:solidFill>
-          <a:ln w="6350">
-            <a:solidFill>
-              <a:srgbClr val="00A896"/>
-            </a:solidFill>
-            <a:prstDash val="solid"/>
-          </a:ln>
-        </p:spPr>
-      </p:sp>
-      <p:sp>
-        <p:nvSpPr>
-          <p:cNvPr id="45" name="Text 43"/>
-          <p:cNvSpPr/>
-          <p:nvPr/>
-        </p:nvSpPr>
-        <p:spPr>
-          <a:xfrm>
-            <a:off x="3392424" y="4453128"/>
-            <a:ext cx="2468880" cy="201168"/>
-          </a:xfrm>
-          <a:prstGeom prst="rect">
-            <a:avLst/>
-          </a:prstGeom>
-          <a:noFill/>
-          <a:ln/>
-        </p:spPr>
-        <p:txBody>
-          <a:bodyPr wrap="square" rtlCol="0" anchor="ctr"/>
-          <a:lstStyle/>
-          <a:p>
-            <a:pPr indent="0" marL="0">
-              <a:buNone/>
-            </a:pPr>
-            <a:r>
-              <a:rPr lang="en-US" sz="900" b="1" dirty="0">
-                <a:solidFill>
-                  <a:srgbClr val="00A896"/>
-                </a:solidFill>
-                <a:latin typeface="Calibri" pitchFamily="34" charset="0"/>
-                <a:ea typeface="Calibri" pitchFamily="34" charset="-122"/>
-                <a:cs typeface="Calibri" pitchFamily="34" charset="-120"/>
-              </a:rPr>
-              <a:t>Example:</a:t>
-            </a:r>
-            <a:endParaRPr lang="en-US" sz="900" dirty="0"/>
-          </a:p>
-        </p:txBody>
-      </p:sp>
-      <p:sp>
-        <p:nvSpPr>
-          <p:cNvPr id="46" name="Text 44"/>
-          <p:cNvSpPr/>
-          <p:nvPr/>
-        </p:nvSpPr>
-        <p:spPr>
-          <a:xfrm>
-            <a:off x="3392424" y="4654296"/>
-            <a:ext cx="2468880" cy="640080"/>
-          </a:xfrm>
-          <a:prstGeom prst="rect">
-            <a:avLst/>
-          </a:prstGeom>
-          <a:noFill/>
-          <a:ln/>
-        </p:spPr>
-        <p:txBody>
-          <a:bodyPr wrap="square" rtlCol="0" anchor="ctr"/>
-          <a:lstStyle/>
-          <a:p>
-            <a:pPr indent="0" marL="0">
-              <a:lnSpc>
-                <a:spcPct val="125000"/>
-              </a:lnSpc>
-              <a:buNone/>
-            </a:pPr>
-            <a:r>
-              <a:rPr lang="en-US" sz="950" i="1" dirty="0">
-                <a:solidFill>
-                  <a:srgbClr val="FFFFFF"/>
-                </a:solidFill>
-                <a:latin typeface="Calibri" pitchFamily="34" charset="0"/>
-                <a:ea typeface="Calibri" pitchFamily="34" charset="-122"/>
-                <a:cs typeface="Calibri" pitchFamily="34" charset="-120"/>
-              </a:rPr>
-              <a:t>Discharge: LACE score missing. CMS readmission measure at risk. Flag.</a:t>
-            </a:r>
-            <a:endParaRPr lang="en-US" sz="950" dirty="0"/>
-          </a:p>
-        </p:txBody>
-      </p:sp>
-      <p:sp>
-        <p:nvSpPr>
-          <p:cNvPr id="47" name="Shape 45"/>
-          <p:cNvSpPr/>
-          <p:nvPr/>
-        </p:nvSpPr>
-        <p:spPr>
-          <a:xfrm>
-            <a:off x="6108192" y="1051560"/>
-            <a:ext cx="2788920" cy="4434840"/>
-          </a:xfrm>
-          <a:prstGeom prst="rect">
-            <a:avLst/>
-          </a:prstGeom>
-          <a:solidFill>
-            <a:srgbClr val="FFFFFF">
-              <a:alpha val="6000"/>
-            </a:srgbClr>
-          </a:solidFill>
-          <a:ln w="12700">
-            <a:solidFill>
-              <a:srgbClr val="02C39A"/>
-            </a:solidFill>
-            <a:prstDash val="solid"/>
-          </a:ln>
-        </p:spPr>
-      </p:sp>
-      <p:sp>
-        <p:nvSpPr>
-          <p:cNvPr id="48" name="Shape 46"/>
-          <p:cNvSpPr/>
-          <p:nvPr/>
-        </p:nvSpPr>
-        <p:spPr>
-          <a:xfrm>
-            <a:off x="6108192" y="1051560"/>
-            <a:ext cx="2788920" cy="713232"/>
-          </a:xfrm>
-          <a:prstGeom prst="rect">
-            <a:avLst/>
-          </a:prstGeom>
-          <a:solidFill>
-            <a:srgbClr val="02C39A">
-              <a:alpha val="95000"/>
-            </a:srgbClr>
-          </a:solidFill>
-          <a:ln w="12700">
-            <a:solidFill>
-              <a:srgbClr val="02C39A"/>
-            </a:solidFill>
-            <a:prstDash val="solid"/>
-          </a:ln>
-        </p:spPr>
-      </p:sp>
-      <p:sp>
-        <p:nvSpPr>
-          <p:cNvPr id="49" name="Text 47"/>
-          <p:cNvSpPr/>
-          <p:nvPr/>
-        </p:nvSpPr>
-        <p:spPr>
-          <a:xfrm>
-            <a:off x="6199632" y="1124712"/>
-            <a:ext cx="411480" cy="502920"/>
-          </a:xfrm>
-          <a:prstGeom prst="rect">
-            <a:avLst/>
-          </a:prstGeom>
-          <a:noFill/>
-          <a:ln/>
-        </p:spPr>
-        <p:txBody>
-          <a:bodyPr wrap="square" rtlCol="0" anchor="ctr"/>
-          <a:lstStyle/>
-          <a:p>
-            <a:pPr algn="ctr" indent="0" marL="0">
-              <a:buNone/>
-            </a:pPr>
-            <a:r>
-              <a:rPr lang="en-US" sz="2000" dirty="0">
-                <a:solidFill>
-                  <a:srgbClr val="000000"/>
-                </a:solidFill>
-              </a:rPr>
-              <a:t>🩺</a:t>
-            </a:r>
-            <a:endParaRPr lang="en-US" sz="2000" dirty="0"/>
-          </a:p>
-        </p:txBody>
-      </p:sp>
-      <p:sp>
-        <p:nvSpPr>
-          <p:cNvPr id="50" name="Text 48"/>
-          <p:cNvSpPr/>
-          <p:nvPr/>
-        </p:nvSpPr>
-        <p:spPr>
-          <a:xfrm>
-            <a:off x="6638544" y="1088136"/>
-            <a:ext cx="2167128" cy="347472"/>
-          </a:xfrm>
-          <a:prstGeom prst="rect">
-            <a:avLst/>
-          </a:prstGeom>
-          <a:noFill/>
-          <a:ln/>
-        </p:spPr>
-        <p:txBody>
-          <a:bodyPr wrap="square" rtlCol="0" anchor="ctr"/>
-          <a:lstStyle/>
-          <a:p>
-            <a:pPr indent="0" marL="0">
-              <a:buNone/>
-            </a:pPr>
-            <a:r>
-              <a:rPr lang="en-US" sz="1400" b="1" dirty="0">
-                <a:solidFill>
-                  <a:srgbClr val="FFFFFF"/>
-                </a:solidFill>
-                <a:latin typeface="Calibri" pitchFamily="34" charset="0"/>
-                <a:ea typeface="Calibri" pitchFamily="34" charset="-122"/>
-                <a:cs typeface="Calibri" pitchFamily="34" charset="-120"/>
-              </a:rPr>
-              <a:t>Clinical Node</a:t>
-            </a:r>
-            <a:endParaRPr lang="en-US" sz="1400" dirty="0"/>
-          </a:p>
-        </p:txBody>
-      </p:sp>
-      <p:sp>
-        <p:nvSpPr>
-          <p:cNvPr id="51" name="Text 49"/>
-          <p:cNvSpPr/>
-          <p:nvPr/>
-        </p:nvSpPr>
-        <p:spPr>
-          <a:xfrm>
-            <a:off x="6638544" y="1417320"/>
-            <a:ext cx="2167128" cy="274320"/>
-          </a:xfrm>
-          <a:prstGeom prst="rect">
-            <a:avLst/>
-          </a:prstGeom>
-          <a:noFill/>
-          <a:ln/>
-        </p:spPr>
-        <p:txBody>
-          <a:bodyPr wrap="square" rtlCol="0" anchor="ctr"/>
-          <a:lstStyle/>
-          <a:p>
-            <a:pPr indent="0" marL="0">
-              <a:buNone/>
-            </a:pPr>
-            <a:r>
-              <a:rPr lang="en-US" sz="950" dirty="0">
-                <a:solidFill>
-                  <a:srgbClr val="D4EEF8"/>
-                </a:solidFill>
-                <a:latin typeface="Calibri" pitchFamily="34" charset="0"/>
-                <a:ea typeface="Calibri" pitchFamily="34" charset="-122"/>
-                <a:cs typeface="Calibri" pitchFamily="34" charset="-120"/>
-              </a:rPr>
-              <a:t>Evaluates care quality and clinical sufficiency</a:t>
-            </a:r>
-            <a:endParaRPr lang="en-US" sz="950" dirty="0"/>
-          </a:p>
-        </p:txBody>
-      </p:sp>
-      <p:sp>
-        <p:nvSpPr>
-          <p:cNvPr id="52" name="Text 50"/>
-          <p:cNvSpPr/>
-          <p:nvPr/>
-        </p:nvSpPr>
-        <p:spPr>
-          <a:xfrm>
-            <a:off x="6245352" y="1892808"/>
-            <a:ext cx="2560320" cy="228600"/>
-          </a:xfrm>
-          <a:prstGeom prst="rect">
-            <a:avLst/>
-          </a:prstGeom>
-          <a:noFill/>
-          <a:ln/>
-        </p:spPr>
-        <p:txBody>
-          <a:bodyPr wrap="square" rtlCol="0" anchor="ctr"/>
-          <a:lstStyle/>
-          <a:p>
-            <a:pPr indent="0" marL="0">
-              <a:buNone/>
-            </a:pPr>
-            <a:r>
-              <a:rPr lang="en-US" sz="1000" b="1" dirty="0">
-                <a:solidFill>
-                  <a:srgbClr val="02C39A"/>
-                </a:solidFill>
-                <a:latin typeface="Calibri" pitchFamily="34" charset="0"/>
-                <a:ea typeface="Calibri" pitchFamily="34" charset="-122"/>
-                <a:cs typeface="Calibri" pitchFamily="34" charset="-120"/>
-              </a:rPr>
-              <a:t>What it catches:</a:t>
-            </a:r>
-            <a:endParaRPr lang="en-US" sz="1000" dirty="0"/>
-          </a:p>
-        </p:txBody>
-      </p:sp>
-      <p:sp>
-        <p:nvSpPr>
-          <p:cNvPr id="53" name="Shape 51"/>
-          <p:cNvSpPr/>
-          <p:nvPr/>
-        </p:nvSpPr>
-        <p:spPr>
-          <a:xfrm>
-            <a:off x="6245352" y="2148840"/>
-            <a:ext cx="2514600" cy="438912"/>
-          </a:xfrm>
-          <a:prstGeom prst="rect">
-            <a:avLst/>
-          </a:prstGeom>
-          <a:solidFill>
-            <a:srgbClr val="FFFFFF">
-              <a:alpha val="12000"/>
-            </a:srgbClr>
-          </a:solidFill>
-          <a:ln w="6350">
-            <a:solidFill>
-              <a:srgbClr val="FFFFFF">
-                <a:alpha val="22000"/>
-              </a:srgbClr>
-            </a:solidFill>
-            <a:prstDash val="solid"/>
-          </a:ln>
-        </p:spPr>
-      </p:sp>
-      <p:sp>
-        <p:nvSpPr>
-          <p:cNvPr id="54" name="Shape 52"/>
-          <p:cNvSpPr/>
-          <p:nvPr/>
-        </p:nvSpPr>
-        <p:spPr>
-          <a:xfrm>
-            <a:off x="6245352" y="2148840"/>
-            <a:ext cx="45720" cy="438912"/>
-          </a:xfrm>
-          <a:prstGeom prst="rect">
-            <a:avLst/>
-          </a:prstGeom>
-          <a:solidFill>
-            <a:srgbClr val="02C39A"/>
-          </a:solidFill>
-          <a:ln w="12700">
-            <a:solidFill>
-              <a:srgbClr val="02C39A"/>
-            </a:solidFill>
-            <a:prstDash val="solid"/>
-          </a:ln>
-        </p:spPr>
-      </p:sp>
-      <p:sp>
-        <p:nvSpPr>
-          <p:cNvPr id="55" name="Text 53"/>
-          <p:cNvSpPr/>
-          <p:nvPr/>
-        </p:nvSpPr>
-        <p:spPr>
-          <a:xfrm>
-            <a:off x="6355080" y="2148840"/>
-            <a:ext cx="2377440" cy="438912"/>
-          </a:xfrm>
-          <a:prstGeom prst="rect">
-            <a:avLst/>
-          </a:prstGeom>
-          <a:noFill/>
-          <a:ln/>
-        </p:spPr>
-        <p:txBody>
-          <a:bodyPr wrap="square" rtlCol="0" anchor="ctr"/>
-          <a:lstStyle/>
-          <a:p>
-            <a:pPr indent="0" marL="0">
-              <a:buNone/>
-            </a:pPr>
-            <a:r>
-              <a:rPr lang="en-US" sz="1000" dirty="0">
-                <a:solidFill>
-                  <a:srgbClr val="FFFFFF"/>
-                </a:solidFill>
-                <a:latin typeface="Calibri" pitchFamily="34" charset="0"/>
-                <a:ea typeface="Calibri" pitchFamily="34" charset="-122"/>
-                <a:cs typeface="Calibri" pitchFamily="34" charset="-120"/>
-              </a:rPr>
-              <a:t>Medical necessity gaps</a:t>
-            </a:r>
-            <a:endParaRPr lang="en-US" sz="1000" dirty="0"/>
-          </a:p>
-        </p:txBody>
-      </p:sp>
-      <p:sp>
-        <p:nvSpPr>
-          <p:cNvPr id="56" name="Shape 54"/>
-          <p:cNvSpPr/>
-          <p:nvPr/>
-        </p:nvSpPr>
-        <p:spPr>
-          <a:xfrm>
-            <a:off x="6245352" y="2660904"/>
-            <a:ext cx="2514600" cy="438912"/>
-          </a:xfrm>
-          <a:prstGeom prst="rect">
-            <a:avLst/>
-          </a:prstGeom>
-          <a:solidFill>
-            <a:srgbClr val="FFFFFF">
-              <a:alpha val="12000"/>
-            </a:srgbClr>
-          </a:solidFill>
-          <a:ln w="6350">
-            <a:solidFill>
-              <a:srgbClr val="FFFFFF">
-                <a:alpha val="22000"/>
-              </a:srgbClr>
-            </a:solidFill>
-            <a:prstDash val="solid"/>
-          </a:ln>
-        </p:spPr>
-      </p:sp>
-      <p:sp>
-        <p:nvSpPr>
-          <p:cNvPr id="57" name="Shape 55"/>
-          <p:cNvSpPr/>
-          <p:nvPr/>
-        </p:nvSpPr>
-        <p:spPr>
-          <a:xfrm>
-            <a:off x="6245352" y="2660904"/>
-            <a:ext cx="45720" cy="438912"/>
-          </a:xfrm>
-          <a:prstGeom prst="rect">
-            <a:avLst/>
-          </a:prstGeom>
-          <a:solidFill>
-            <a:srgbClr val="02C39A"/>
-          </a:solidFill>
-          <a:ln w="12700">
-            <a:solidFill>
-              <a:srgbClr val="02C39A"/>
-            </a:solidFill>
-            <a:prstDash val="solid"/>
-          </a:ln>
-        </p:spPr>
-      </p:sp>
-      <p:sp>
-        <p:nvSpPr>
-          <p:cNvPr id="58" name="Text 56"/>
-          <p:cNvSpPr/>
-          <p:nvPr/>
-        </p:nvSpPr>
-        <p:spPr>
-          <a:xfrm>
-            <a:off x="6355080" y="2660904"/>
-            <a:ext cx="2377440" cy="438912"/>
-          </a:xfrm>
-          <a:prstGeom prst="rect">
-            <a:avLst/>
-          </a:prstGeom>
-          <a:noFill/>
-          <a:ln/>
-        </p:spPr>
-        <p:txBody>
-          <a:bodyPr wrap="square" rtlCol="0" anchor="ctr"/>
-          <a:lstStyle/>
-          <a:p>
-            <a:pPr indent="0" marL="0">
-              <a:buNone/>
-            </a:pPr>
-            <a:r>
-              <a:rPr lang="en-US" sz="1000" dirty="0">
-                <a:solidFill>
-                  <a:srgbClr val="FFFFFF"/>
-                </a:solidFill>
-                <a:latin typeface="Calibri" pitchFamily="34" charset="0"/>
-                <a:ea typeface="Calibri" pitchFamily="34" charset="-122"/>
-                <a:cs typeface="Calibri" pitchFamily="34" charset="-120"/>
-              </a:rPr>
-              <a:t>Incomplete HPI elements</a:t>
-            </a:r>
-            <a:endParaRPr lang="en-US" sz="1000" dirty="0"/>
-          </a:p>
-        </p:txBody>
-      </p:sp>
-      <p:sp>
-        <p:nvSpPr>
-          <p:cNvPr id="59" name="Shape 57"/>
-          <p:cNvSpPr/>
-          <p:nvPr/>
-        </p:nvSpPr>
-        <p:spPr>
-          <a:xfrm>
-            <a:off x="6245352" y="3172968"/>
-            <a:ext cx="2514600" cy="438912"/>
-          </a:xfrm>
-          <a:prstGeom prst="rect">
-            <a:avLst/>
-          </a:prstGeom>
-          <a:solidFill>
-            <a:srgbClr val="FFFFFF">
-              <a:alpha val="12000"/>
-            </a:srgbClr>
-          </a:solidFill>
-          <a:ln w="6350">
-            <a:solidFill>
-              <a:srgbClr val="FFFFFF">
-                <a:alpha val="22000"/>
-              </a:srgbClr>
-            </a:solidFill>
-            <a:prstDash val="solid"/>
-          </a:ln>
-        </p:spPr>
-      </p:sp>
-      <p:sp>
-        <p:nvSpPr>
-          <p:cNvPr id="60" name="Shape 58"/>
-          <p:cNvSpPr/>
-          <p:nvPr/>
-        </p:nvSpPr>
-        <p:spPr>
-          <a:xfrm>
-            <a:off x="6245352" y="3172968"/>
-            <a:ext cx="45720" cy="438912"/>
-          </a:xfrm>
-          <a:prstGeom prst="rect">
-            <a:avLst/>
-          </a:prstGeom>
-          <a:solidFill>
-            <a:srgbClr val="02C39A"/>
-          </a:solidFill>
-          <a:ln w="12700">
-            <a:solidFill>
-              <a:srgbClr val="02C39A"/>
-            </a:solidFill>
-            <a:prstDash val="solid"/>
-          </a:ln>
-        </p:spPr>
-      </p:sp>
-      <p:sp>
-        <p:nvSpPr>
-          <p:cNvPr id="61" name="Text 59"/>
-          <p:cNvSpPr/>
-          <p:nvPr/>
-        </p:nvSpPr>
-        <p:spPr>
-          <a:xfrm>
-            <a:off x="6355080" y="3172968"/>
-            <a:ext cx="2377440" cy="438912"/>
-          </a:xfrm>
-          <a:prstGeom prst="rect">
-            <a:avLst/>
-          </a:prstGeom>
-          <a:noFill/>
-          <a:ln/>
-        </p:spPr>
-        <p:txBody>
-          <a:bodyPr wrap="square" rtlCol="0" anchor="ctr"/>
-          <a:lstStyle/>
-          <a:p>
-            <a:pPr indent="0" marL="0">
-              <a:buNone/>
-            </a:pPr>
-            <a:r>
-              <a:rPr lang="en-US" sz="1000" dirty="0">
-                <a:solidFill>
-                  <a:srgbClr val="FFFFFF"/>
-                </a:solidFill>
-                <a:latin typeface="Calibri" pitchFamily="34" charset="0"/>
-                <a:ea typeface="Calibri" pitchFamily="34" charset="-122"/>
-                <a:cs typeface="Calibri" pitchFamily="34" charset="-120"/>
-              </a:rPr>
-              <a:t>Missing safety netting</a:t>
-            </a:r>
-            <a:endParaRPr lang="en-US" sz="1000" dirty="0"/>
-          </a:p>
-        </p:txBody>
-      </p:sp>
-      <p:sp>
-        <p:nvSpPr>
-          <p:cNvPr id="62" name="Shape 60"/>
-          <p:cNvSpPr/>
-          <p:nvPr/>
-        </p:nvSpPr>
-        <p:spPr>
-          <a:xfrm>
-            <a:off x="6245352" y="3685032"/>
-            <a:ext cx="2514600" cy="438912"/>
-          </a:xfrm>
-          <a:prstGeom prst="rect">
-            <a:avLst/>
-          </a:prstGeom>
-          <a:solidFill>
-            <a:srgbClr val="FFFFFF">
-              <a:alpha val="12000"/>
-            </a:srgbClr>
-          </a:solidFill>
-          <a:ln w="6350">
-            <a:solidFill>
-              <a:srgbClr val="FFFFFF">
-                <a:alpha val="22000"/>
-              </a:srgbClr>
-            </a:solidFill>
-            <a:prstDash val="solid"/>
-          </a:ln>
-        </p:spPr>
-      </p:sp>
-      <p:sp>
-        <p:nvSpPr>
-          <p:cNvPr id="63" name="Shape 61"/>
-          <p:cNvSpPr/>
-          <p:nvPr/>
-        </p:nvSpPr>
-        <p:spPr>
-          <a:xfrm>
-            <a:off x="6245352" y="3685032"/>
-            <a:ext cx="45720" cy="438912"/>
-          </a:xfrm>
-          <a:prstGeom prst="rect">
-            <a:avLst/>
-          </a:prstGeom>
-          <a:solidFill>
-            <a:srgbClr val="02C39A"/>
-          </a:solidFill>
-          <a:ln w="12700">
-            <a:solidFill>
-              <a:srgbClr val="02C39A"/>
-            </a:solidFill>
-            <a:prstDash val="solid"/>
-          </a:ln>
-        </p:spPr>
-      </p:sp>
-      <p:sp>
-        <p:nvSpPr>
-          <p:cNvPr id="64" name="Text 62"/>
-          <p:cNvSpPr/>
-          <p:nvPr/>
-        </p:nvSpPr>
-        <p:spPr>
-          <a:xfrm>
-            <a:off x="6355080" y="3685032"/>
-            <a:ext cx="2377440" cy="438912"/>
-          </a:xfrm>
-          <a:prstGeom prst="rect">
-            <a:avLst/>
-          </a:prstGeom>
-          <a:noFill/>
-          <a:ln/>
-        </p:spPr>
-        <p:txBody>
-          <a:bodyPr wrap="square" rtlCol="0" anchor="ctr"/>
-          <a:lstStyle/>
-          <a:p>
-            <a:pPr indent="0" marL="0">
-              <a:buNone/>
-            </a:pPr>
-            <a:r>
-              <a:rPr lang="en-US" sz="1000" dirty="0">
-                <a:solidFill>
-                  <a:srgbClr val="FFFFFF"/>
-                </a:solidFill>
-                <a:latin typeface="Calibri" pitchFamily="34" charset="0"/>
-                <a:ea typeface="Calibri" pitchFamily="34" charset="-122"/>
-                <a:cs typeface="Calibri" pitchFamily="34" charset="-120"/>
-              </a:rPr>
-              <a:t>High-risk patient flags (LACE, social determinants)</a:t>
-            </a:r>
-            <a:endParaRPr lang="en-US" sz="1000" dirty="0"/>
-          </a:p>
-        </p:txBody>
-      </p:sp>
-      <p:sp>
-        <p:nvSpPr>
-          <p:cNvPr id="65" name="Shape 63"/>
-          <p:cNvSpPr/>
-          <p:nvPr/>
-        </p:nvSpPr>
-        <p:spPr>
-          <a:xfrm>
-            <a:off x="6199632" y="4389120"/>
-            <a:ext cx="2606040" cy="987552"/>
-          </a:xfrm>
-          <a:prstGeom prst="rect">
-            <a:avLst/>
-          </a:prstGeom>
-          <a:solidFill>
-            <a:srgbClr val="02C39A">
-              <a:alpha val="18000"/>
-            </a:srgbClr>
-          </a:solidFill>
-          <a:ln w="6350">
-            <a:solidFill>
-              <a:srgbClr val="02C39A"/>
-            </a:solidFill>
-            <a:prstDash val="solid"/>
-          </a:ln>
-        </p:spPr>
-      </p:sp>
-      <p:sp>
-        <p:nvSpPr>
-          <p:cNvPr id="66" name="Text 64"/>
-          <p:cNvSpPr/>
-          <p:nvPr/>
-        </p:nvSpPr>
-        <p:spPr>
-          <a:xfrm>
-            <a:off x="6272784" y="4453128"/>
-            <a:ext cx="2468880" cy="201168"/>
-          </a:xfrm>
-          <a:prstGeom prst="rect">
-            <a:avLst/>
-          </a:prstGeom>
-          <a:noFill/>
-          <a:ln/>
-        </p:spPr>
-        <p:txBody>
-          <a:bodyPr wrap="square" rtlCol="0" anchor="ctr"/>
-          <a:lstStyle/>
-          <a:p>
-            <a:pPr indent="0" marL="0">
-              <a:buNone/>
-            </a:pPr>
-            <a:r>
-              <a:rPr lang="en-US" sz="900" b="1" dirty="0">
-                <a:solidFill>
-                  <a:srgbClr val="02C39A"/>
-                </a:solidFill>
-                <a:latin typeface="Calibri" pitchFamily="34" charset="0"/>
-                <a:ea typeface="Calibri" pitchFamily="34" charset="-122"/>
-                <a:cs typeface="Calibri" pitchFamily="34" charset="-120"/>
-              </a:rPr>
-              <a:t>Example:</a:t>
-            </a:r>
-            <a:endParaRPr lang="en-US" sz="900" dirty="0"/>
-          </a:p>
-        </p:txBody>
-      </p:sp>
-      <p:sp>
-        <p:nvSpPr>
-          <p:cNvPr id="67" name="Text 65"/>
-          <p:cNvSpPr/>
-          <p:nvPr/>
-        </p:nvSpPr>
-        <p:spPr>
-          <a:xfrm>
-            <a:off x="6272784" y="4654296"/>
-            <a:ext cx="2468880" cy="640080"/>
-          </a:xfrm>
-          <a:prstGeom prst="rect">
-            <a:avLst/>
-          </a:prstGeom>
-          <a:noFill/>
-          <a:ln/>
-        </p:spPr>
-        <p:txBody>
-          <a:bodyPr wrap="square" rtlCol="0" anchor="ctr"/>
-          <a:lstStyle/>
-          <a:p>
-            <a:pPr indent="0" marL="0">
-              <a:lnSpc>
-                <a:spcPct val="125000"/>
-              </a:lnSpc>
-              <a:buNone/>
-            </a:pPr>
-            <a:r>
-              <a:rPr lang="en-US" sz="950" i="1" dirty="0">
-                <a:solidFill>
-                  <a:srgbClr val="FFFFFF"/>
-                </a:solidFill>
-                <a:latin typeface="Calibri" pitchFamily="34" charset="0"/>
-                <a:ea typeface="Calibri" pitchFamily="34" charset="-122"/>
-                <a:cs typeface="Calibri" pitchFamily="34" charset="-120"/>
-              </a:rPr>
-              <a:t>Referral: SVT with delta waves + syncope — EP subspecialty confirmed.</a:t>
-            </a:r>
-            <a:endParaRPr lang="en-US" sz="950" dirty="0"/>
-          </a:p>
-        </p:txBody>
-      </p:sp>
-      <p:sp>
-        <p:nvSpPr>
-          <p:cNvPr id="68" name="Shape 66"/>
-          <p:cNvSpPr/>
-          <p:nvPr/>
-        </p:nvSpPr>
-        <p:spPr>
-          <a:xfrm>
-            <a:off x="8988552" y="1051560"/>
-            <a:ext cx="2788920" cy="4434840"/>
-          </a:xfrm>
-          <a:prstGeom prst="rect">
-            <a:avLst/>
-          </a:prstGeom>
-          <a:solidFill>
-            <a:srgbClr val="FFFFFF">
-              <a:alpha val="6000"/>
-            </a:srgbClr>
-          </a:solidFill>
-          <a:ln w="12700">
-            <a:solidFill>
-              <a:srgbClr val="D97706"/>
-            </a:solidFill>
-            <a:prstDash val="solid"/>
-          </a:ln>
-        </p:spPr>
-      </p:sp>
-      <p:sp>
-        <p:nvSpPr>
-          <p:cNvPr id="69" name="Shape 67"/>
-          <p:cNvSpPr/>
-          <p:nvPr/>
-        </p:nvSpPr>
-        <p:spPr>
-          <a:xfrm>
-            <a:off x="8988552" y="1051560"/>
-            <a:ext cx="2788920" cy="713232"/>
-          </a:xfrm>
-          <a:prstGeom prst="rect">
-            <a:avLst/>
-          </a:prstGeom>
-          <a:solidFill>
-            <a:srgbClr val="D97706">
-              <a:alpha val="95000"/>
-            </a:srgbClr>
-          </a:solidFill>
-          <a:ln w="12700">
-            <a:solidFill>
-              <a:srgbClr val="D97706"/>
-            </a:solidFill>
-            <a:prstDash val="solid"/>
-          </a:ln>
-        </p:spPr>
-      </p:sp>
-      <p:sp>
-        <p:nvSpPr>
-          <p:cNvPr id="70" name="Text 68"/>
-          <p:cNvSpPr/>
-          <p:nvPr/>
-        </p:nvSpPr>
-        <p:spPr>
-          <a:xfrm>
-            <a:off x="9079992" y="1124712"/>
-            <a:ext cx="411480" cy="502920"/>
-          </a:xfrm>
-          <a:prstGeom prst="rect">
-            <a:avLst/>
-          </a:prstGeom>
-          <a:noFill/>
-          <a:ln/>
-        </p:spPr>
-        <p:txBody>
-          <a:bodyPr wrap="square" rtlCol="0" anchor="ctr"/>
-          <a:lstStyle/>
-          <a:p>
-            <a:pPr algn="ctr" indent="0" marL="0">
-              <a:buNone/>
-            </a:pPr>
-            <a:r>
-              <a:rPr lang="en-US" sz="2000" dirty="0">
-                <a:solidFill>
-                  <a:srgbClr val="000000"/>
-                </a:solidFill>
-              </a:rPr>
-              <a:t>⚠</a:t>
-            </a:r>
-            <a:endParaRPr lang="en-US" sz="2000" dirty="0"/>
-          </a:p>
-        </p:txBody>
-      </p:sp>
-      <p:sp>
-        <p:nvSpPr>
-          <p:cNvPr id="71" name="Text 69"/>
-          <p:cNvSpPr/>
-          <p:nvPr/>
-        </p:nvSpPr>
-        <p:spPr>
-          <a:xfrm>
-            <a:off x="9518904" y="1088136"/>
-            <a:ext cx="2167128" cy="347472"/>
-          </a:xfrm>
-          <a:prstGeom prst="rect">
-            <a:avLst/>
-          </a:prstGeom>
-          <a:noFill/>
-          <a:ln/>
-        </p:spPr>
-        <p:txBody>
-          <a:bodyPr wrap="square" rtlCol="0" anchor="ctr"/>
-          <a:lstStyle/>
-          <a:p>
-            <a:pPr indent="0" marL="0">
-              <a:buNone/>
-            </a:pPr>
-            <a:r>
-              <a:rPr lang="en-US" sz="1400" b="1" dirty="0">
-                <a:solidFill>
-                  <a:srgbClr val="FFFFFF"/>
-                </a:solidFill>
-                <a:latin typeface="Calibri" pitchFamily="34" charset="0"/>
-                <a:ea typeface="Calibri" pitchFamily="34" charset="-122"/>
-                <a:cs typeface="Calibri" pitchFamily="34" charset="-120"/>
-              </a:rPr>
-              <a:t>Risk Node</a:t>
-            </a:r>
-            <a:endParaRPr lang="en-US" sz="1400" dirty="0"/>
-          </a:p>
-        </p:txBody>
-      </p:sp>
-      <p:sp>
-        <p:nvSpPr>
-          <p:cNvPr id="72" name="Text 70"/>
-          <p:cNvSpPr/>
-          <p:nvPr/>
-        </p:nvSpPr>
-        <p:spPr>
-          <a:xfrm>
-            <a:off x="9518904" y="1417320"/>
-            <a:ext cx="2167128" cy="274320"/>
-          </a:xfrm>
-          <a:prstGeom prst="rect">
-            <a:avLst/>
-          </a:prstGeom>
-          <a:noFill/>
-          <a:ln/>
-        </p:spPr>
-        <p:txBody>
-          <a:bodyPr wrap="square" rtlCol="0" anchor="ctr"/>
-          <a:lstStyle/>
-          <a:p>
-            <a:pPr indent="0" marL="0">
-              <a:buNone/>
-            </a:pPr>
-            <a:r>
-              <a:rPr lang="en-US" sz="950" dirty="0">
-                <a:solidFill>
-                  <a:srgbClr val="D4EEF8"/>
-                </a:solidFill>
-                <a:latin typeface="Calibri" pitchFamily="34" charset="0"/>
-                <a:ea typeface="Calibri" pitchFamily="34" charset="-122"/>
-                <a:cs typeface="Calibri" pitchFamily="34" charset="-120"/>
-              </a:rPr>
-              <a:t>Quantifies liability and revenue risk</a:t>
-            </a:r>
-            <a:endParaRPr lang="en-US" sz="950" dirty="0"/>
-          </a:p>
-        </p:txBody>
-      </p:sp>
-      <p:sp>
-        <p:nvSpPr>
-          <p:cNvPr id="73" name="Text 71"/>
-          <p:cNvSpPr/>
-          <p:nvPr/>
-        </p:nvSpPr>
-        <p:spPr>
-          <a:xfrm>
-            <a:off x="9125712" y="1892808"/>
-            <a:ext cx="2560320" cy="228600"/>
-          </a:xfrm>
-          <a:prstGeom prst="rect">
-            <a:avLst/>
-          </a:prstGeom>
-          <a:noFill/>
-          <a:ln/>
-        </p:spPr>
-        <p:txBody>
-          <a:bodyPr wrap="square" rtlCol="0" anchor="ctr"/>
-          <a:lstStyle/>
-          <a:p>
-            <a:pPr indent="0" marL="0">
-              <a:buNone/>
-            </a:pPr>
-            <a:r>
-              <a:rPr lang="en-US" sz="1000" b="1" dirty="0">
-                <a:solidFill>
-                  <a:srgbClr val="D97706"/>
-                </a:solidFill>
-                <a:latin typeface="Calibri" pitchFamily="34" charset="0"/>
-                <a:ea typeface="Calibri" pitchFamily="34" charset="-122"/>
-                <a:cs typeface="Calibri" pitchFamily="34" charset="-120"/>
-              </a:rPr>
-              <a:t>What it catches:</a:t>
-            </a:r>
-            <a:endParaRPr lang="en-US" sz="1000" dirty="0"/>
-          </a:p>
-        </p:txBody>
-      </p:sp>
-      <p:sp>
-        <p:nvSpPr>
-          <p:cNvPr id="74" name="Shape 72"/>
-          <p:cNvSpPr/>
-          <p:nvPr/>
-        </p:nvSpPr>
-        <p:spPr>
-          <a:xfrm>
-            <a:off x="9125712" y="2148840"/>
-            <a:ext cx="2514600" cy="438912"/>
-          </a:xfrm>
-          <a:prstGeom prst="rect">
-            <a:avLst/>
-          </a:prstGeom>
-          <a:solidFill>
-            <a:srgbClr val="FFFFFF">
-              <a:alpha val="12000"/>
-            </a:srgbClr>
-          </a:solidFill>
-          <a:ln w="6350">
-            <a:solidFill>
-              <a:srgbClr val="FFFFFF">
-                <a:alpha val="22000"/>
-              </a:srgbClr>
-            </a:solidFill>
-            <a:prstDash val="solid"/>
-          </a:ln>
-        </p:spPr>
-      </p:sp>
-      <p:sp>
-        <p:nvSpPr>
-          <p:cNvPr id="75" name="Shape 73"/>
-          <p:cNvSpPr/>
-          <p:nvPr/>
-        </p:nvSpPr>
-        <p:spPr>
-          <a:xfrm>
-            <a:off x="9125712" y="2148840"/>
-            <a:ext cx="45720" cy="438912"/>
-          </a:xfrm>
-          <a:prstGeom prst="rect">
-            <a:avLst/>
-          </a:prstGeom>
-          <a:solidFill>
-            <a:srgbClr val="D97706"/>
-          </a:solidFill>
-          <a:ln w="12700">
-            <a:solidFill>
-              <a:srgbClr val="D97706"/>
-            </a:solidFill>
-            <a:prstDash val="solid"/>
-          </a:ln>
-        </p:spPr>
-      </p:sp>
-      <p:sp>
-        <p:nvSpPr>
-          <p:cNvPr id="76" name="Text 74"/>
-          <p:cNvSpPr/>
-          <p:nvPr/>
-        </p:nvSpPr>
-        <p:spPr>
-          <a:xfrm>
-            <a:off x="9235440" y="2148840"/>
-            <a:ext cx="2377440" cy="438912"/>
-          </a:xfrm>
-          <a:prstGeom prst="rect">
-            <a:avLst/>
-          </a:prstGeom>
-          <a:noFill/>
-          <a:ln/>
-        </p:spPr>
-        <p:txBody>
-          <a:bodyPr wrap="square" rtlCol="0" anchor="ctr"/>
-          <a:lstStyle/>
-          <a:p>
-            <a:pPr indent="0" marL="0">
-              <a:buNone/>
-            </a:pPr>
-            <a:r>
-              <a:rPr lang="en-US" sz="1000" dirty="0">
-                <a:solidFill>
-                  <a:srgbClr val="FFFFFF"/>
-                </a:solidFill>
-                <a:latin typeface="Calibri" pitchFamily="34" charset="0"/>
-                <a:ea typeface="Calibri" pitchFamily="34" charset="-122"/>
-                <a:cs typeface="Calibri" pitchFamily="34" charset="-120"/>
-              </a:rPr>
-              <a:t>Denial probability scores</a:t>
-            </a:r>
-            <a:endParaRPr lang="en-US" sz="1000" dirty="0"/>
-          </a:p>
-        </p:txBody>
-      </p:sp>
-      <p:sp>
-        <p:nvSpPr>
-          <p:cNvPr id="77" name="Shape 75"/>
-          <p:cNvSpPr/>
-          <p:nvPr/>
-        </p:nvSpPr>
-        <p:spPr>
-          <a:xfrm>
-            <a:off x="9125712" y="2660904"/>
-            <a:ext cx="2514600" cy="438912"/>
-          </a:xfrm>
-          <a:prstGeom prst="rect">
-            <a:avLst/>
-          </a:prstGeom>
-          <a:solidFill>
-            <a:srgbClr val="FFFFFF">
-              <a:alpha val="12000"/>
-            </a:srgbClr>
-          </a:solidFill>
-          <a:ln w="6350">
-            <a:solidFill>
-              <a:srgbClr val="FFFFFF">
-                <a:alpha val="22000"/>
-              </a:srgbClr>
-            </a:solidFill>
-            <a:prstDash val="solid"/>
-          </a:ln>
-        </p:spPr>
-      </p:sp>
-      <p:sp>
-        <p:nvSpPr>
-          <p:cNvPr id="78" name="Shape 76"/>
-          <p:cNvSpPr/>
-          <p:nvPr/>
-        </p:nvSpPr>
-        <p:spPr>
-          <a:xfrm>
-            <a:off x="9125712" y="2660904"/>
-            <a:ext cx="45720" cy="438912"/>
-          </a:xfrm>
-          <a:prstGeom prst="rect">
-            <a:avLst/>
-          </a:prstGeom>
-          <a:solidFill>
-            <a:srgbClr val="D97706"/>
-          </a:solidFill>
-          <a:ln w="12700">
-            <a:solidFill>
-              <a:srgbClr val="D97706"/>
-            </a:solidFill>
-            <a:prstDash val="solid"/>
-          </a:ln>
-        </p:spPr>
-      </p:sp>
-      <p:sp>
-        <p:nvSpPr>
-          <p:cNvPr id="79" name="Text 77"/>
-          <p:cNvSpPr/>
-          <p:nvPr/>
-        </p:nvSpPr>
-        <p:spPr>
-          <a:xfrm>
-            <a:off x="9235440" y="2660904"/>
-            <a:ext cx="2377440" cy="438912"/>
-          </a:xfrm>
-          <a:prstGeom prst="rect">
-            <a:avLst/>
-          </a:prstGeom>
-          <a:noFill/>
-          <a:ln/>
-        </p:spPr>
-        <p:txBody>
-          <a:bodyPr wrap="square" rtlCol="0" anchor="ctr"/>
-          <a:lstStyle/>
-          <a:p>
-            <a:pPr indent="0" marL="0">
-              <a:buNone/>
-            </a:pPr>
-            <a:r>
-              <a:rPr lang="en-US" sz="1000" dirty="0">
-                <a:solidFill>
-                  <a:srgbClr val="FFFFFF"/>
-                </a:solidFill>
-                <a:latin typeface="Calibri" pitchFamily="34" charset="0"/>
-                <a:ea typeface="Calibri" pitchFamily="34" charset="-122"/>
-                <a:cs typeface="Calibri" pitchFamily="34" charset="-120"/>
-              </a:rPr>
-              <a:t>Appeal deadline tracking</a:t>
-            </a:r>
-            <a:endParaRPr lang="en-US" sz="1000" dirty="0"/>
-          </a:p>
-        </p:txBody>
-      </p:sp>
-      <p:sp>
-        <p:nvSpPr>
-          <p:cNvPr id="80" name="Shape 78"/>
-          <p:cNvSpPr/>
-          <p:nvPr/>
-        </p:nvSpPr>
-        <p:spPr>
-          <a:xfrm>
-            <a:off x="9125712" y="3172968"/>
-            <a:ext cx="2514600" cy="438912"/>
-          </a:xfrm>
-          <a:prstGeom prst="rect">
-            <a:avLst/>
-          </a:prstGeom>
-          <a:solidFill>
-            <a:srgbClr val="FFFFFF">
-              <a:alpha val="12000"/>
-            </a:srgbClr>
-          </a:solidFill>
-          <a:ln w="6350">
-            <a:solidFill>
-              <a:srgbClr val="FFFFFF">
-                <a:alpha val="22000"/>
-              </a:srgbClr>
-            </a:solidFill>
-            <a:prstDash val="solid"/>
-          </a:ln>
-        </p:spPr>
-      </p:sp>
-      <p:sp>
-        <p:nvSpPr>
-          <p:cNvPr id="81" name="Shape 79"/>
-          <p:cNvSpPr/>
-          <p:nvPr/>
-        </p:nvSpPr>
-        <p:spPr>
-          <a:xfrm>
-            <a:off x="9125712" y="3172968"/>
-            <a:ext cx="45720" cy="438912"/>
-          </a:xfrm>
-          <a:prstGeom prst="rect">
-            <a:avLst/>
-          </a:prstGeom>
-          <a:solidFill>
-            <a:srgbClr val="D97706"/>
-          </a:solidFill>
-          <a:ln w="12700">
-            <a:solidFill>
-              <a:srgbClr val="D97706"/>
-            </a:solidFill>
-            <a:prstDash val="solid"/>
-          </a:ln>
-        </p:spPr>
-      </p:sp>
-      <p:sp>
-        <p:nvSpPr>
-          <p:cNvPr id="82" name="Text 80"/>
-          <p:cNvSpPr/>
-          <p:nvPr/>
-        </p:nvSpPr>
-        <p:spPr>
-          <a:xfrm>
-            <a:off x="9235440" y="3172968"/>
-            <a:ext cx="2377440" cy="438912"/>
-          </a:xfrm>
-          <a:prstGeom prst="rect">
-            <a:avLst/>
-          </a:prstGeom>
-          <a:noFill/>
-          <a:ln/>
-        </p:spPr>
-        <p:txBody>
-          <a:bodyPr wrap="square" rtlCol="0" anchor="ctr"/>
-          <a:lstStyle/>
-          <a:p>
-            <a:pPr indent="0" marL="0">
-              <a:buNone/>
-            </a:pPr>
-            <a:r>
-              <a:rPr lang="en-US" sz="1000" dirty="0">
-                <a:solidFill>
-                  <a:srgbClr val="FFFFFF"/>
-                </a:solidFill>
-                <a:latin typeface="Calibri" pitchFamily="34" charset="0"/>
-                <a:ea typeface="Calibri" pitchFamily="34" charset="-122"/>
-                <a:cs typeface="Calibri" pitchFamily="34" charset="-120"/>
-              </a:rPr>
-              <a:t>Patient safety event risk</a:t>
-            </a:r>
-            <a:endParaRPr lang="en-US" sz="1000" dirty="0"/>
-          </a:p>
-        </p:txBody>
-      </p:sp>
-      <p:sp>
-        <p:nvSpPr>
-          <p:cNvPr id="83" name="Shape 81"/>
-          <p:cNvSpPr/>
-          <p:nvPr/>
-        </p:nvSpPr>
-        <p:spPr>
-          <a:xfrm>
-            <a:off x="9125712" y="3685032"/>
-            <a:ext cx="2514600" cy="438912"/>
-          </a:xfrm>
-          <a:prstGeom prst="rect">
-            <a:avLst/>
-          </a:prstGeom>
-          <a:solidFill>
-            <a:srgbClr val="FFFFFF">
-              <a:alpha val="12000"/>
-            </a:srgbClr>
-          </a:solidFill>
-          <a:ln w="6350">
-            <a:solidFill>
-              <a:srgbClr val="FFFFFF">
-                <a:alpha val="22000"/>
-              </a:srgbClr>
-            </a:solidFill>
-            <a:prstDash val="solid"/>
-          </a:ln>
-        </p:spPr>
-      </p:sp>
-      <p:sp>
-        <p:nvSpPr>
-          <p:cNvPr id="84" name="Shape 82"/>
-          <p:cNvSpPr/>
-          <p:nvPr/>
-        </p:nvSpPr>
-        <p:spPr>
-          <a:xfrm>
-            <a:off x="9125712" y="3685032"/>
-            <a:ext cx="45720" cy="438912"/>
-          </a:xfrm>
-          <a:prstGeom prst="rect">
-            <a:avLst/>
-          </a:prstGeom>
-          <a:solidFill>
-            <a:srgbClr val="D97706"/>
-          </a:solidFill>
-          <a:ln w="12700">
-            <a:solidFill>
-              <a:srgbClr val="D97706"/>
-            </a:solidFill>
-            <a:prstDash val="solid"/>
-          </a:ln>
-        </p:spPr>
-      </p:sp>
-      <p:sp>
-        <p:nvSpPr>
-          <p:cNvPr id="85" name="Text 83"/>
-          <p:cNvSpPr/>
-          <p:nvPr/>
-        </p:nvSpPr>
-        <p:spPr>
-          <a:xfrm>
-            <a:off x="9235440" y="3685032"/>
-            <a:ext cx="2377440" cy="438912"/>
-          </a:xfrm>
-          <a:prstGeom prst="rect">
-            <a:avLst/>
-          </a:prstGeom>
-          <a:noFill/>
-          <a:ln/>
-        </p:spPr>
-        <p:txBody>
-          <a:bodyPr wrap="square" rtlCol="0" anchor="ctr"/>
-          <a:lstStyle/>
-          <a:p>
-            <a:pPr indent="0" marL="0">
-              <a:buNone/>
-            </a:pPr>
-            <a:r>
-              <a:rPr lang="en-US" sz="1000" dirty="0">
-                <a:solidFill>
-                  <a:srgbClr val="FFFFFF"/>
-                </a:solidFill>
-                <a:latin typeface="Calibri" pitchFamily="34" charset="0"/>
-                <a:ea typeface="Calibri" pitchFamily="34" charset="-122"/>
-                <a:cs typeface="Calibri" pitchFamily="34" charset="-120"/>
-              </a:rPr>
-              <a:t>Audit and recoupment exposure</a:t>
-            </a:r>
-            <a:endParaRPr lang="en-US" sz="1000" dirty="0"/>
-          </a:p>
-        </p:txBody>
-      </p:sp>
-      <p:sp>
-        <p:nvSpPr>
-          <p:cNvPr id="86" name="Shape 84"/>
-          <p:cNvSpPr/>
-          <p:nvPr/>
-        </p:nvSpPr>
-        <p:spPr>
-          <a:xfrm>
-            <a:off x="9079992" y="4389120"/>
-            <a:ext cx="2606040" cy="987552"/>
-          </a:xfrm>
-          <a:prstGeom prst="rect">
-            <a:avLst/>
-          </a:prstGeom>
-          <a:solidFill>
-            <a:srgbClr val="D97706">
-              <a:alpha val="18000"/>
-            </a:srgbClr>
-          </a:solidFill>
-          <a:ln w="6350">
-            <a:solidFill>
-              <a:srgbClr val="D97706"/>
-            </a:solidFill>
-            <a:prstDash val="solid"/>
-          </a:ln>
-        </p:spPr>
-      </p:sp>
-      <p:sp>
-        <p:nvSpPr>
-          <p:cNvPr id="87" name="Text 85"/>
-          <p:cNvSpPr/>
-          <p:nvPr/>
-        </p:nvSpPr>
-        <p:spPr>
-          <a:xfrm>
-            <a:off x="9153144" y="4453128"/>
-            <a:ext cx="2468880" cy="201168"/>
-          </a:xfrm>
-          <a:prstGeom prst="rect">
-            <a:avLst/>
-          </a:prstGeom>
-          <a:noFill/>
-          <a:ln/>
-        </p:spPr>
-        <p:txBody>
-          <a:bodyPr wrap="square" rtlCol="0" anchor="ctr"/>
-          <a:lstStyle/>
-          <a:p>
-            <a:pPr indent="0" marL="0">
-              <a:buNone/>
-            </a:pPr>
-            <a:r>
-              <a:rPr lang="en-US" sz="900" b="1" dirty="0">
-                <a:solidFill>
-                  <a:srgbClr val="D97706"/>
-                </a:solidFill>
-                <a:latin typeface="Calibri" pitchFamily="34" charset="0"/>
-                <a:ea typeface="Calibri" pitchFamily="34" charset="-122"/>
-                <a:cs typeface="Calibri" pitchFamily="34" charset="-120"/>
-              </a:rPr>
-              <a:t>Example:</a:t>
-            </a:r>
-            <a:endParaRPr lang="en-US" sz="900" dirty="0"/>
-          </a:p>
-        </p:txBody>
-      </p:sp>
-      <p:sp>
-        <p:nvSpPr>
-          <p:cNvPr id="88" name="Text 86"/>
-          <p:cNvSpPr/>
-          <p:nvPr/>
-        </p:nvSpPr>
-        <p:spPr>
-          <a:xfrm>
-            <a:off x="9153144" y="4654296"/>
-            <a:ext cx="2468880" cy="640080"/>
-          </a:xfrm>
-          <a:prstGeom prst="rect">
-            <a:avLst/>
-          </a:prstGeom>
-          <a:noFill/>
-          <a:ln/>
-        </p:spPr>
-        <p:txBody>
-          <a:bodyPr wrap="square" rtlCol="0" anchor="ctr"/>
-          <a:lstStyle/>
-          <a:p>
-            <a:pPr indent="0" marL="0">
-              <a:lnSpc>
-                <a:spcPct val="125000"/>
-              </a:lnSpc>
-              <a:buNone/>
-            </a:pPr>
-            <a:r>
-              <a:rPr lang="en-US" sz="950" i="1" dirty="0">
-                <a:solidFill>
-                  <a:srgbClr val="FFFFFF"/>
-                </a:solidFill>
-                <a:latin typeface="Calibri" pitchFamily="34" charset="0"/>
-                <a:ea typeface="Calibri" pitchFamily="34" charset="-122"/>
-                <a:cs typeface="Calibri" pitchFamily="34" charset="-120"/>
-              </a:rPr>
-              <a:t>Claim Denial: CO-97 + CO-4 dual-code = payer error likely. Appeal HIGH.</a:t>
-            </a:r>
-            <a:endParaRPr lang="en-US" sz="950" dirty="0"/>
-          </a:p>
-        </p:txBody>
-      </p:sp>
-      <p:sp>
-        <p:nvSpPr>
-          <p:cNvPr id="89" name="Text 87"/>
-          <p:cNvSpPr/>
-          <p:nvPr/>
-        </p:nvSpPr>
-        <p:spPr>
-          <a:xfrm>
-            <a:off x="347472" y="5669280"/>
-            <a:ext cx="11475720" cy="320040"/>
-          </a:xfrm>
-          <a:prstGeom prst="rect">
-            <a:avLst/>
-          </a:prstGeom>
-          <a:noFill/>
-          <a:ln/>
-        </p:spPr>
-        <p:txBody>
-          <a:bodyPr wrap="square" rtlCol="0" anchor="ctr"/>
-          <a:lstStyle/>
-          <a:p>
-            <a:pPr algn="ctr" indent="0" marL="0">
-              <a:buNone/>
-            </a:pPr>
-            <a:r>
-              <a:rPr lang="en-US" sz="1100" b="1" dirty="0">
-                <a:solidFill>
-                  <a:srgbClr val="00A896"/>
-                </a:solidFill>
-                <a:latin typeface="Calibri" pitchFamily="34" charset="0"/>
-                <a:ea typeface="Calibri" pitchFamily="34" charset="-122"/>
-                <a:cs typeface="Calibri" pitchFamily="34" charset="-120"/>
-              </a:rPr>
-              <a:t>All four nodes report simultaneously to the HC-Strategist — who synthesizes findings into a single BNCA.</a:t>
-            </a:r>
-            <a:endParaRPr lang="en-US" sz="1100" dirty="0"/>
-          </a:p>
-        </p:txBody>
-      </p:sp>
-      <p:sp>
-        <p:nvSpPr>
-          <p:cNvPr id="90" name="Text 88"/>
-          <p:cNvSpPr/>
-          <p:nvPr/>
-        </p:nvSpPr>
-        <p:spPr>
-          <a:xfrm>
-            <a:off x="11247120" y="6537960"/>
-            <a:ext cx="822960" cy="228600"/>
-          </a:xfrm>
-          <a:prstGeom prst="rect">
-            <a:avLst/>
-          </a:prstGeom>
-          <a:noFill/>
-          <a:ln/>
-        </p:spPr>
-        <p:txBody>
-          <a:bodyPr wrap="square" rtlCol="0" anchor="ctr"/>
-          <a:lstStyle/>
-          <a:p>
-            <a:pPr algn="r" indent="0" marL="0">
-              <a:buNone/>
-            </a:pPr>
-            <a:r>
-              <a:rPr lang="en-US" sz="900" dirty="0">
-                <a:solidFill>
-                  <a:srgbClr val="FFFFFF"/>
-                </a:solidFill>
-                <a:latin typeface="Calibri" pitchFamily="34" charset="0"/>
-                <a:ea typeface="Calibri" pitchFamily="34" charset="-122"/>
-                <a:cs typeface="Calibri" pitchFamily="34" charset="-120"/>
-              </a:rPr>
-              <a:t>5 / 18</a:t>
             </a:r>
             <a:endParaRPr lang="en-US" sz="900" dirty="0"/>
           </a:p>
